--- a/docs/submission/kintsugi-offgrid-pitch.pptx
+++ b/docs/submission/kintsugi-offgrid-pitch.pptx
@@ -1481,7 +1481,7 @@
           <a:p>
             <a:r>
               <a:rPr lang="en-US" dirty="0"/>
-              <a:t>Product thinking: the person does three things and looks at pictures. The guide never shows a blank screen — every stage has its one next action. The engineer's tabs are there for the curious.</a:t>
+              <a:t>Product thinking: the person does three things and looks at pictures. The guide never shows a blank screen — every stage has its one next action. And the finished part is not a file: it is a parametric designer like MakerWorld's, except every fit dimension shows where its number came from and warns before a check would fail.</a:t>
             </a:r>
             <a:endParaRPr lang="en-US" dirty="0"/>
           </a:p>
@@ -2207,7 +2207,7 @@
       </p:sp>
       <p:pic>
         <p:nvPicPr>
-          <p:cNvPr id="12" name="Image 0" descr="/tmp/claude-0/-home-claude/ccadd335-e104-5fb7-93a7-7cce0c5de540/scratchpad/deck/img/assembly_iso.png">    </p:cNvPr>
+          <p:cNvPr id="12" name="Image 0" descr="/home/claude/kintsugi/docs/submission/img/assembly_iso.png">    </p:cNvPr>
           <p:cNvPicPr>
             <a:picLocks noChangeAspect="1"/>
           </p:cNvPicPr>
@@ -4456,7 +4456,7 @@
                 <a:ea typeface="Courier New" pitchFamily="34" charset="-122"/>
                 <a:cs typeface="Courier New" pitchFamily="34" charset="-120"/>
               </a:rPr>
-              <a:t>79 tests</a:t>
+              <a:t>96 tests</a:t>
             </a:r>
             <a:endParaRPr lang="en-US" sz="1300" dirty="0"/>
           </a:p>
@@ -7139,7 +7139,7 @@
       </p:sp>
       <p:pic>
         <p:nvPicPr>
-          <p:cNvPr id="4" name="Image 0" descr="/tmp/claude-0/-home-claude/ccadd335-e104-5fb7-93a7-7cce0c5de540/scratchpad/deck/img/section_aa.png">    </p:cNvPr>
+          <p:cNvPr id="4" name="Image 0" descr="/home/claude/kintsugi/docs/submission/img/section_aa.png">    </p:cNvPr>
           <p:cNvPicPr>
             <a:picLocks noChangeAspect="1"/>
           </p:cNvPicPr>
@@ -7831,7 +7831,7 @@
       </p:sp>
       <p:pic>
         <p:nvPicPr>
-          <p:cNvPr id="4" name="Image 0" descr="/tmp/claude-0/-home-claude/ccadd335-e104-5fb7-93a7-7cce0c5de540/scratchpad/deck/img/capture_guide.png">    </p:cNvPr>
+          <p:cNvPr id="4" name="Image 0" descr="/home/claude/kintsugi/docs/submission/img/capture_guide.png">    </p:cNvPr>
           <p:cNvPicPr>
             <a:picLocks noChangeAspect="1"/>
           </p:cNvPicPr>
@@ -7881,7 +7881,7 @@
       </p:sp>
       <p:pic>
         <p:nvPicPr>
-          <p:cNvPr id="6" name="Image 1" descr="/tmp/claude-0/-home-claude/ccadd335-e104-5fb7-93a7-7cce0c5de540/scratchpad/deck/img/evidence_map.png">    </p:cNvPr>
+          <p:cNvPr id="6" name="Image 1" descr="/home/claude/kintsugi/docs/submission/img/evidence_map.png">    </p:cNvPr>
           <p:cNvPicPr>
             <a:picLocks noChangeAspect="1"/>
           </p:cNvPicPr>
@@ -8639,7 +8639,7 @@
       </p:sp>
       <p:pic>
         <p:nvPicPr>
-          <p:cNvPr id="4" name="Image 0" descr="/tmp/claude-0/-home-claude/ccadd335-e104-5fb7-93a7-7cce0c5de540/scratchpad/deck/img/graph_pipeline.png">    </p:cNvPr>
+          <p:cNvPr id="4" name="Image 0" descr="/home/claude/kintsugi/docs/submission/img/graph_pipeline.png">    </p:cNvPr>
           <p:cNvPicPr>
             <a:picLocks noChangeAspect="1"/>
           </p:cNvPicPr>
@@ -12666,7 +12666,7 @@
       </p:sp>
       <p:pic>
         <p:nvPicPr>
-          <p:cNvPr id="6" name="Image 0" descr="/tmp/claude-0/-home-claude/ccadd335-e104-5fb7-93a7-7cce0c5de540/scratchpad/deck/img/ab_human_top.png">    </p:cNvPr>
+          <p:cNvPr id="6" name="Image 0" descr="/home/claude/kintsugi/docs/submission/img/ab_human_top.png">    </p:cNvPr>
           <p:cNvPicPr>
             <a:picLocks noChangeAspect="1"/>
           </p:cNvPicPr>
@@ -12716,7 +12716,7 @@
       </p:sp>
       <p:pic>
         <p:nvPicPr>
-          <p:cNvPr id="8" name="Image 1" descr="/tmp/claude-0/-home-claude/ccadd335-e104-5fb7-93a7-7cce0c5de540/scratchpad/deck/img/ab_kin_top.png">    </p:cNvPr>
+          <p:cNvPr id="8" name="Image 1" descr="/home/claude/kintsugi/docs/submission/img/ab_kin_top.png">    </p:cNvPr>
           <p:cNvPicPr>
             <a:picLocks noChangeAspect="1"/>
           </p:cNvPicPr>
@@ -13223,7 +13223,7 @@
                 <a:ea typeface="Courier New" pitchFamily="34" charset="-122"/>
                 <a:cs typeface="Courier New" pitchFamily="34" charset="-120"/>
               </a:rPr>
-              <a:t>79 tests</a:t>
+              <a:t>96 tests</a:t>
             </a:r>
             <a:endParaRPr lang="en-US" sz="1300" dirty="0"/>
           </a:p>
@@ -13476,7 +13476,7 @@
               <a:buNone/>
             </a:pPr>
             <a:r>
-              <a:rPr lang="en-US" sz="3000" b="1" dirty="0">
+              <a:rPr lang="en-US" sz="2600" b="1" dirty="0">
                 <a:solidFill>
                   <a:srgbClr val="18212C"/>
                 </a:solidFill>
@@ -13484,9 +13484,9 @@
                 <a:ea typeface="Arial" pitchFamily="34" charset="-122"/>
                 <a:cs typeface="Arial" pitchFamily="34" charset="-120"/>
               </a:rPr>
-              <a:t>A guide, not a console.</a:t>
-            </a:r>
-            <a:endParaRPr lang="en-US" sz="3000" dirty="0"/>
+              <a:t>A guide, not a console. A part you can change.</a:t>
+            </a:r>
+            <a:endParaRPr lang="en-US" sz="2600" dirty="0"/>
           </a:p>
         </p:txBody>
       </p:sp>
@@ -13519,7 +13519,7 @@
       </p:sp>
       <p:pic>
         <p:nvPicPr>
-          <p:cNvPr id="4" name="Image 0" descr="/tmp/claude-0/-home-claude/ccadd335-e104-5fb7-93a7-7cce0c5de540/scratchpad/deck/img/review.png">    </p:cNvPr>
+          <p:cNvPr id="4" name="Image 0" descr="/home/claude/kintsugi/docs/submission/img/customizer.png">    </p:cNvPr>
           <p:cNvPicPr>
             <a:picLocks noChangeAspect="1"/>
           </p:cNvPicPr>
@@ -13597,7 +13597,7 @@
                 <a:ea typeface="Calibri" pitchFamily="34" charset="-122"/>
                 <a:cs typeface="Calibri" pitchFamily="34" charset="-120"/>
               </a:rPr>
-              <a:t>Six steps on the left, the engineer's view on the right</a:t>
+              <a:t>Sliders that know their evidence</a:t>
             </a:r>
             <a:endParaRPr lang="en-US" sz="1150" dirty="0"/>
           </a:p>
@@ -13636,7 +13636,7 @@
                 <a:ea typeface="Calibri" pitchFamily="34" charset="-122"/>
                 <a:cs typeface="Calibri" pitchFamily="34" charset="-120"/>
               </a:rPr>
-              <a:t>Photos and readings from a phone on the same Wi-Fi; checks, sliders, code, spec and graphs on the desktop.</a:t>
+              <a:t>A live 3D draft on each change; the measured value, its sources and its tolerance band on the rail; computed lengths turn red against the spec before you apply.</a:t>
             </a:r>
             <a:endParaRPr lang="en-US" sz="950" dirty="0"/>
           </a:p>
@@ -13699,7 +13699,7 @@
                 <a:ea typeface="Calibri" pitchFamily="34" charset="-122"/>
                 <a:cs typeface="Calibri" pitchFamily="34" charset="-120"/>
               </a:rPr>
-              <a:t>Coupon before the part</a:t>
+              <a:t>Six steps left, the engineer's view right</a:t>
             </a:r>
             <a:endParaRPr lang="en-US" sz="1150" dirty="0"/>
           </a:p>
@@ -13738,7 +13738,7 @@
                 <a:ea typeface="Calibri" pitchFamily="34" charset="-122"/>
                 <a:cs typeface="Calibri" pitchFamily="34" charset="-120"/>
               </a:rPr>
-              <a:t>Three clearances in one small print; the one that slides on locks the fit.</a:t>
+              <a:t>Photos and readings from a phone on the same Wi-Fi; checks, code, spec and graphs on the desktop.</a:t>
             </a:r>
             <a:endParaRPr lang="en-US" sz="950" dirty="0"/>
           </a:p>
@@ -13801,7 +13801,7 @@
                 <a:ea typeface="Calibri" pitchFamily="34" charset="-122"/>
                 <a:cs typeface="Calibri" pitchFamily="34" charset="-120"/>
               </a:rPr>
-              <a:t>A print card that explains itself</a:t>
+              <a:t>Coupon before the part</a:t>
             </a:r>
             <a:endParaRPr lang="en-US" sz="1150" dirty="0"/>
           </a:p>
@@ -13840,7 +13840,7 @@
                 <a:ea typeface="Calibri" pitchFamily="34" charset="-122"/>
                 <a:cs typeface="Calibri" pitchFamily="34" charset="-120"/>
               </a:rPr>
-              <a:t>Walls, infill, orientation and why — from the load in the spec and the overhang measured on the mesh.</a:t>
+              <a:t>Three clearances in one small print; the one that slides on locks the fit.</a:t>
             </a:r>
             <a:endParaRPr lang="en-US" sz="950" dirty="0"/>
           </a:p>
@@ -13981,7 +13981,7 @@
                 <a:ea typeface="Courier New" pitchFamily="34" charset="-122"/>
                 <a:cs typeface="Courier New" pitchFamily="34" charset="-120"/>
               </a:rPr>
-              <a:t>review step: every hard check green, the critic's verdict, the designer's narration — and one text box to ask for a change</a:t>
+              <a:t>the Customize tab: a draft of the handle after two slider moves, the verified mesh ghosted behind it, the bottle neck in place, Apply &amp; verify one click away</a:t>
             </a:r>
             <a:endParaRPr lang="en-US" sz="850" dirty="0"/>
           </a:p>

--- a/docs/submission/kintsugi-offgrid-pitch.pptx
+++ b/docs/submission/kintsugi-offgrid-pitch.pptx
@@ -1836,7 +1836,7 @@
     <p:bg>
       <p:bgPr>
         <a:solidFill>
-          <a:srgbClr val="0E1A2B"/>
+          <a:srgbClr val="05142E"/>
         </a:solidFill>
       </p:bgPr>
     </p:bg>
@@ -1854,16 +1854,40 @@
           <a:chExt cx="0" cy="0"/>
         </a:xfrm>
       </p:grpSpPr>
-      <p:sp>
-        <p:nvSpPr>
-          <p:cNvPr id="2" name="Text 0"/>
-          <p:cNvSpPr txBox="1"/>
-          <p:nvPr/>
-        </p:nvSpPr>
-        <p:spPr>
-          <a:xfrm>
-            <a:off x="548640" y="960120"/>
-            <a:ext cx="5120640" cy="914400"/>
+      <p:pic>
+        <p:nvPicPr>
+          <p:cNvPr id="2" name="Image 0" descr="/home/claude/kintsugi/docs/submission/img/logo-mark.png">    </p:cNvPr>
+          <p:cNvPicPr>
+            <a:picLocks noChangeAspect="1"/>
+          </p:cNvPicPr>
+          <p:nvPr/>
+        </p:nvPicPr>
+        <p:blipFill>
+          <a:blip r:embed="rId1"/>
+          <a:stretch>
+            <a:fillRect/>
+          </a:stretch>
+        </p:blipFill>
+        <p:spPr>
+          <a:xfrm>
+            <a:off x="548640" y="1005840"/>
+            <a:ext cx="822960" cy="822960"/>
+          </a:xfrm>
+          <a:prstGeom prst="rect">
+            <a:avLst/>
+          </a:prstGeom>
+        </p:spPr>
+      </p:pic>
+      <p:sp>
+        <p:nvSpPr>
+          <p:cNvPr id="3" name="Text 0"/>
+          <p:cNvSpPr txBox="1"/>
+          <p:nvPr/>
+        </p:nvSpPr>
+        <p:spPr>
+          <a:xfrm>
+            <a:off x="1508760" y="960120"/>
+            <a:ext cx="4572000" cy="914400"/>
           </a:xfrm>
           <a:prstGeom prst="rect">
             <a:avLst/>
@@ -1881,7 +1905,7 @@
             <a:r>
               <a:rPr lang="en-US" sz="5400" b="1" spc="600" kern="0" dirty="0">
                 <a:solidFill>
-                  <a:srgbClr val="E4ECF6"/>
+                  <a:srgbClr val="F3F7FE"/>
                 </a:solidFill>
                 <a:latin typeface="Arial" pitchFamily="34" charset="0"/>
                 <a:ea typeface="Arial" pitchFamily="34" charset="-122"/>
@@ -1895,7 +1919,7 @@
       </p:sp>
       <p:sp>
         <p:nvSpPr>
-          <p:cNvPr id="3" name="Text 1"/>
+          <p:cNvPr id="4" name="Text 1"/>
           <p:cNvSpPr txBox="1"/>
           <p:nvPr/>
         </p:nvSpPr>
@@ -1920,7 +1944,7 @@
             <a:r>
               <a:rPr lang="en-US" sz="2400" dirty="0">
                 <a:solidFill>
-                  <a:srgbClr val="8FB8FF"/>
+                  <a:srgbClr val="6C9EF0"/>
                 </a:solidFill>
                 <a:latin typeface="Calibri" pitchFamily="34" charset="0"/>
                 <a:ea typeface="Calibri" pitchFamily="34" charset="-122"/>
@@ -1934,7 +1958,7 @@
       </p:sp>
       <p:sp>
         <p:nvSpPr>
-          <p:cNvPr id="4" name="Text 2"/>
+          <p:cNvPr id="5" name="Text 2"/>
           <p:cNvSpPr txBox="1"/>
           <p:nvPr/>
         </p:nvSpPr>
@@ -1959,7 +1983,7 @@
             <a:r>
               <a:rPr lang="en-US" sz="1400" dirty="0">
                 <a:solidFill>
-                  <a:srgbClr val="AFBCCB"/>
+                  <a:srgbClr val="BED4F9"/>
                 </a:solidFill>
                 <a:latin typeface="Calibri" pitchFamily="34" charset="0"/>
                 <a:ea typeface="Calibri" pitchFamily="34" charset="-122"/>
@@ -1973,7 +1997,7 @@
       </p:sp>
       <p:sp>
         <p:nvSpPr>
-          <p:cNvPr id="5" name="Shape 3"/>
+          <p:cNvPr id="6" name="Shape 3"/>
           <p:cNvSpPr/>
           <p:nvPr/>
         </p:nvSpPr>
@@ -1988,7 +2012,7 @@
           <a:noFill/>
           <a:ln w="15875">
             <a:solidFill>
-              <a:srgbClr val="8FB8FF"/>
+              <a:srgbClr val="6C9EF0"/>
             </a:solidFill>
             <a:prstDash val="solid"/>
             <a:headEnd type="triangle"/>
@@ -1998,7 +2022,7 @@
       </p:sp>
       <p:sp>
         <p:nvSpPr>
-          <p:cNvPr id="6" name="Shape 4"/>
+          <p:cNvPr id="7" name="Shape 4"/>
           <p:cNvSpPr/>
           <p:nvPr/>
         </p:nvSpPr>
@@ -2013,7 +2037,7 @@
           <a:noFill/>
           <a:ln w="12700">
             <a:solidFill>
-              <a:srgbClr val="8FB8FF"/>
+              <a:srgbClr val="6C9EF0"/>
             </a:solidFill>
             <a:prstDash val="solid"/>
           </a:ln>
@@ -2021,7 +2045,7 @@
       </p:sp>
       <p:sp>
         <p:nvSpPr>
-          <p:cNvPr id="7" name="Shape 5"/>
+          <p:cNvPr id="8" name="Shape 5"/>
           <p:cNvSpPr/>
           <p:nvPr/>
         </p:nvSpPr>
@@ -2036,7 +2060,7 @@
           <a:noFill/>
           <a:ln w="12700">
             <a:solidFill>
-              <a:srgbClr val="8FB8FF"/>
+              <a:srgbClr val="6C9EF0"/>
             </a:solidFill>
             <a:prstDash val="solid"/>
           </a:ln>
@@ -2044,7 +2068,7 @@
       </p:sp>
       <p:sp>
         <p:nvSpPr>
-          <p:cNvPr id="8" name="Text 6"/>
+          <p:cNvPr id="9" name="Text 6"/>
           <p:cNvSpPr txBox="1"/>
           <p:nvPr/>
         </p:nvSpPr>
@@ -2057,7 +2081,7 @@
             <a:avLst/>
           </a:prstGeom>
           <a:solidFill>
-            <a:srgbClr val="0E1A2B"/>
+            <a:srgbClr val="05142E"/>
           </a:solidFill>
           <a:ln/>
         </p:spPr>
@@ -2071,7 +2095,7 @@
             <a:r>
               <a:rPr lang="en-US" sz="1400" b="1" dirty="0">
                 <a:solidFill>
-                  <a:srgbClr val="8FB8FF"/>
+                  <a:srgbClr val="6C9EF0"/>
                 </a:solidFill>
                 <a:latin typeface="Courier New" pitchFamily="34" charset="0"/>
                 <a:ea typeface="Courier New" pitchFamily="34" charset="-122"/>
@@ -2085,7 +2109,7 @@
       </p:sp>
       <p:sp>
         <p:nvSpPr>
-          <p:cNvPr id="9" name="Text 7"/>
+          <p:cNvPr id="10" name="Text 7"/>
           <p:cNvSpPr txBox="1"/>
           <p:nvPr/>
         </p:nvSpPr>
@@ -2110,7 +2134,7 @@
             <a:r>
               <a:rPr lang="en-US" sz="1000" dirty="0">
                 <a:solidFill>
-                  <a:srgbClr val="AFBCCB"/>
+                  <a:srgbClr val="BED4F9"/>
                 </a:solidFill>
                 <a:latin typeface="Courier New" pitchFamily="34" charset="0"/>
                 <a:ea typeface="Courier New" pitchFamily="34" charset="-122"/>
@@ -2127,7 +2151,7 @@
             <a:r>
               <a:rPr lang="en-US" sz="1000" dirty="0">
                 <a:solidFill>
-                  <a:srgbClr val="AFBCCB"/>
+                  <a:srgbClr val="BED4F9"/>
                 </a:solidFill>
                 <a:latin typeface="Courier New" pitchFamily="34" charset="0"/>
                 <a:ea typeface="Courier New" pitchFamily="34" charset="-122"/>
@@ -2141,7 +2165,7 @@
       </p:sp>
       <p:sp>
         <p:nvSpPr>
-          <p:cNvPr id="10" name="Text 8"/>
+          <p:cNvPr id="11" name="Text 8"/>
           <p:cNvSpPr txBox="1"/>
           <p:nvPr/>
         </p:nvSpPr>
@@ -2166,7 +2190,7 @@
             <a:r>
               <a:rPr lang="en-US" sz="1200" dirty="0">
                 <a:solidFill>
-                  <a:srgbClr val="AFBCCB"/>
+                  <a:srgbClr val="BED4F9"/>
                 </a:solidFill>
                 <a:latin typeface="Calibri" pitchFamily="34" charset="0"/>
                 <a:ea typeface="Calibri" pitchFamily="34" charset="-122"/>
@@ -2180,7 +2204,7 @@
       </p:sp>
       <p:sp>
         <p:nvSpPr>
-          <p:cNvPr id="11" name="Shape 9"/>
+          <p:cNvPr id="12" name="Shape 9"/>
           <p:cNvSpPr/>
           <p:nvPr/>
         </p:nvSpPr>
@@ -2195,7 +2219,7 @@
             </a:avLst>
           </a:prstGeom>
           <a:solidFill>
-            <a:srgbClr val="132238"/>
+            <a:srgbClr val="0B2049"/>
           </a:solidFill>
           <a:ln w="9525">
             <a:solidFill>
@@ -2207,14 +2231,14 @@
       </p:sp>
       <p:pic>
         <p:nvPicPr>
-          <p:cNvPr id="12" name="Image 0" descr="/home/claude/kintsugi/docs/submission/img/assembly_iso.png">    </p:cNvPr>
+          <p:cNvPr id="13" name="Image 1" descr="/home/claude/kintsugi/docs/submission/img/assembly_iso.png">    </p:cNvPr>
           <p:cNvPicPr>
             <a:picLocks noChangeAspect="1"/>
           </p:cNvPicPr>
           <p:nvPr/>
         </p:nvPicPr>
         <p:blipFill>
-          <a:blip r:embed="rId1"/>
+          <a:blip r:embed="rId2"/>
           <a:srcRect l="0" r="0" t="0" b="0"/>
           <a:stretch/>
         </p:blipFill>
@@ -2230,7 +2254,7 @@
       </p:pic>
       <p:sp>
         <p:nvSpPr>
-          <p:cNvPr id="13" name="Text 10"/>
+          <p:cNvPr id="14" name="Text 10"/>
           <p:cNvSpPr txBox="1"/>
           <p:nvPr/>
         </p:nvSpPr>
@@ -2255,7 +2279,7 @@
             <a:r>
               <a:rPr lang="en-US" sz="800" dirty="0">
                 <a:solidFill>
-                  <a:srgbClr val="AFBCCB"/>
+                  <a:srgbClr val="BED4F9"/>
                 </a:solidFill>
                 <a:latin typeface="Courier New" pitchFamily="34" charset="0"/>
                 <a:ea typeface="Courier New" pitchFamily="34" charset="-122"/>
@@ -2281,7 +2305,7 @@
     <p:bg>
       <p:bgPr>
         <a:solidFill>
-          <a:srgbClr val="0E1A2B"/>
+          <a:srgbClr val="05142E"/>
         </a:solidFill>
       </p:bgPr>
     </p:bg>
@@ -2326,7 +2350,7 @@
             <a:r>
               <a:rPr lang="en-US" sz="3000" b="1" dirty="0">
                 <a:solidFill>
-                  <a:srgbClr val="E4ECF6"/>
+                  <a:srgbClr val="F3F7FE"/>
                 </a:solidFill>
                 <a:latin typeface="Arial" pitchFamily="34" charset="0"/>
                 <a:ea typeface="Arial" pitchFamily="34" charset="-122"/>
@@ -2355,7 +2379,7 @@
             </a:avLst>
           </a:prstGeom>
           <a:solidFill>
-            <a:srgbClr val="132238"/>
+            <a:srgbClr val="0B2049"/>
           </a:solidFill>
           <a:ln w="9525">
             <a:solidFill>
@@ -2416,7 +2440,7 @@
             <a:r>
               <a:rPr lang="en-US" sz="1250" b="1" dirty="0">
                 <a:solidFill>
-                  <a:srgbClr val="E4ECF6"/>
+                  <a:srgbClr val="F3F7FE"/>
                 </a:solidFill>
                 <a:latin typeface="Calibri" pitchFamily="34" charset="0"/>
                 <a:ea typeface="Calibri" pitchFamily="34" charset="-122"/>
@@ -2455,7 +2479,7 @@
             <a:r>
               <a:rPr lang="en-US" sz="1000" dirty="0">
                 <a:solidFill>
-                  <a:srgbClr val="AFBCCB"/>
+                  <a:srgbClr val="BED4F9"/>
                 </a:solidFill>
                 <a:latin typeface="Calibri" pitchFamily="34" charset="0"/>
                 <a:ea typeface="Calibri" pitchFamily="34" charset="-122"/>
@@ -2484,7 +2508,7 @@
             </a:avLst>
           </a:prstGeom>
           <a:solidFill>
-            <a:srgbClr val="132238"/>
+            <a:srgbClr val="0B2049"/>
           </a:solidFill>
           <a:ln w="9525">
             <a:solidFill>
@@ -2545,7 +2569,7 @@
             <a:r>
               <a:rPr lang="en-US" sz="1250" b="1" dirty="0">
                 <a:solidFill>
-                  <a:srgbClr val="E4ECF6"/>
+                  <a:srgbClr val="F3F7FE"/>
                 </a:solidFill>
                 <a:latin typeface="Calibri" pitchFamily="34" charset="0"/>
                 <a:ea typeface="Calibri" pitchFamily="34" charset="-122"/>
@@ -2584,7 +2608,7 @@
             <a:r>
               <a:rPr lang="en-US" sz="1000" dirty="0">
                 <a:solidFill>
-                  <a:srgbClr val="AFBCCB"/>
+                  <a:srgbClr val="BED4F9"/>
                 </a:solidFill>
                 <a:latin typeface="Calibri" pitchFamily="34" charset="0"/>
                 <a:ea typeface="Calibri" pitchFamily="34" charset="-122"/>
@@ -2613,7 +2637,7 @@
             </a:avLst>
           </a:prstGeom>
           <a:solidFill>
-            <a:srgbClr val="132238"/>
+            <a:srgbClr val="0B2049"/>
           </a:solidFill>
           <a:ln w="9525">
             <a:solidFill>
@@ -2674,7 +2698,7 @@
             <a:r>
               <a:rPr lang="en-US" sz="1250" b="1" dirty="0">
                 <a:solidFill>
-                  <a:srgbClr val="E4ECF6"/>
+                  <a:srgbClr val="F3F7FE"/>
                 </a:solidFill>
                 <a:latin typeface="Calibri" pitchFamily="34" charset="0"/>
                 <a:ea typeface="Calibri" pitchFamily="34" charset="-122"/>
@@ -2713,7 +2737,7 @@
             <a:r>
               <a:rPr lang="en-US" sz="1000" dirty="0">
                 <a:solidFill>
-                  <a:srgbClr val="AFBCCB"/>
+                  <a:srgbClr val="BED4F9"/>
                 </a:solidFill>
                 <a:latin typeface="Calibri" pitchFamily="34" charset="0"/>
                 <a:ea typeface="Calibri" pitchFamily="34" charset="-122"/>
@@ -2742,7 +2766,7 @@
             </a:avLst>
           </a:prstGeom>
           <a:solidFill>
-            <a:srgbClr val="132238"/>
+            <a:srgbClr val="0B2049"/>
           </a:solidFill>
           <a:ln w="9525">
             <a:solidFill>
@@ -2803,7 +2827,7 @@
             <a:r>
               <a:rPr lang="en-US" sz="1250" b="1" dirty="0">
                 <a:solidFill>
-                  <a:srgbClr val="E4ECF6"/>
+                  <a:srgbClr val="F3F7FE"/>
                 </a:solidFill>
                 <a:latin typeface="Calibri" pitchFamily="34" charset="0"/>
                 <a:ea typeface="Calibri" pitchFamily="34" charset="-122"/>
@@ -2842,7 +2866,7 @@
             <a:r>
               <a:rPr lang="en-US" sz="1000" dirty="0">
                 <a:solidFill>
-                  <a:srgbClr val="AFBCCB"/>
+                  <a:srgbClr val="BED4F9"/>
                 </a:solidFill>
                 <a:latin typeface="Calibri" pitchFamily="34" charset="0"/>
                 <a:ea typeface="Calibri" pitchFamily="34" charset="-122"/>
@@ -2871,7 +2895,7 @@
           <a:noFill/>
           <a:ln w="15875">
             <a:solidFill>
-              <a:srgbClr val="8FB8FF"/>
+              <a:srgbClr val="6C9EF0"/>
             </a:solidFill>
             <a:prstDash val="solid"/>
             <a:headEnd type="triangle"/>
@@ -2896,7 +2920,7 @@
           <a:noFill/>
           <a:ln w="12700">
             <a:solidFill>
-              <a:srgbClr val="8FB8FF"/>
+              <a:srgbClr val="6C9EF0"/>
             </a:solidFill>
             <a:prstDash val="solid"/>
           </a:ln>
@@ -2919,7 +2943,7 @@
           <a:noFill/>
           <a:ln w="12700">
             <a:solidFill>
-              <a:srgbClr val="8FB8FF"/>
+              <a:srgbClr val="6C9EF0"/>
             </a:solidFill>
             <a:prstDash val="solid"/>
           </a:ln>
@@ -2940,7 +2964,7 @@
             <a:avLst/>
           </a:prstGeom>
           <a:solidFill>
-            <a:srgbClr val="0E1A2B"/>
+            <a:srgbClr val="05142E"/>
           </a:solidFill>
           <a:ln/>
         </p:spPr>
@@ -2954,7 +2978,7 @@
             <a:r>
               <a:rPr lang="en-US" sz="1300" b="1" dirty="0">
                 <a:solidFill>
-                  <a:srgbClr val="8FB8FF"/>
+                  <a:srgbClr val="6C9EF0"/>
                 </a:solidFill>
                 <a:latin typeface="Courier New" pitchFamily="34" charset="0"/>
                 <a:ea typeface="Courier New" pitchFamily="34" charset="-122"/>
@@ -2993,7 +3017,7 @@
             <a:r>
               <a:rPr lang="en-US" sz="1100" dirty="0">
                 <a:solidFill>
-                  <a:srgbClr val="AFBCCB"/>
+                  <a:srgbClr val="BED4F9"/>
                 </a:solidFill>
                 <a:latin typeface="Calibri" pitchFamily="34" charset="0"/>
                 <a:ea typeface="Calibri" pitchFamily="34" charset="-122"/>
@@ -3019,7 +3043,7 @@
     <p:bg>
       <p:bgPr>
         <a:solidFill>
-          <a:srgbClr val="FAFBFC"/>
+          <a:srgbClr val="F3F7FE"/>
         </a:solidFill>
       </p:bgPr>
     </p:bg>
@@ -3064,7 +3088,7 @@
             <a:r>
               <a:rPr lang="en-US" sz="3000" b="1" dirty="0">
                 <a:solidFill>
-                  <a:srgbClr val="18212C"/>
+                  <a:srgbClr val="05142E"/>
                 </a:solidFill>
                 <a:latin typeface="Arial" pitchFamily="34" charset="0"/>
                 <a:ea typeface="Arial" pitchFamily="34" charset="-122"/>
@@ -3091,11 +3115,11 @@
             <a:avLst/>
           </a:prstGeom>
           <a:solidFill>
-            <a:srgbClr val="1F4FA8"/>
+            <a:srgbClr val="155DD3"/>
           </a:solidFill>
           <a:ln w="12700">
             <a:solidFill>
-              <a:srgbClr val="1F4FA8"/>
+              <a:srgbClr val="155DD3"/>
             </a:solidFill>
             <a:prstDash val="solid"/>
           </a:ln>
@@ -3157,7 +3181,7 @@
           <a:noFill/>
           <a:ln w="12700">
             <a:solidFill>
-              <a:srgbClr val="C9D0DA"/>
+              <a:srgbClr val="C9D6EC"/>
             </a:solidFill>
             <a:prstDash val="solid"/>
             <a:tailEnd type="triangle"/>
@@ -3191,7 +3215,7 @@
             <a:r>
               <a:rPr lang="en-US" sz="1100" b="1" dirty="0">
                 <a:solidFill>
-                  <a:srgbClr val="18212C"/>
+                  <a:srgbClr val="05142E"/>
                 </a:solidFill>
                 <a:latin typeface="Calibri" pitchFamily="34" charset="0"/>
                 <a:ea typeface="Calibri" pitchFamily="34" charset="-122"/>
@@ -3230,7 +3254,7 @@
             <a:r>
               <a:rPr lang="en-US" sz="900" dirty="0">
                 <a:solidFill>
-                  <a:srgbClr val="4A5563"/>
+                  <a:srgbClr val="3C485C"/>
                 </a:solidFill>
                 <a:latin typeface="Calibri" pitchFamily="34" charset="0"/>
                 <a:ea typeface="Calibri" pitchFamily="34" charset="-122"/>
@@ -3257,11 +3281,11 @@
             <a:avLst/>
           </a:prstGeom>
           <a:solidFill>
-            <a:srgbClr val="1F4FA8"/>
+            <a:srgbClr val="155DD3"/>
           </a:solidFill>
           <a:ln w="12700">
             <a:solidFill>
-              <a:srgbClr val="1F4FA8"/>
+              <a:srgbClr val="155DD3"/>
             </a:solidFill>
             <a:prstDash val="solid"/>
           </a:ln>
@@ -3323,7 +3347,7 @@
           <a:noFill/>
           <a:ln w="12700">
             <a:solidFill>
-              <a:srgbClr val="C9D0DA"/>
+              <a:srgbClr val="C9D6EC"/>
             </a:solidFill>
             <a:prstDash val="solid"/>
             <a:tailEnd type="triangle"/>
@@ -3357,7 +3381,7 @@
             <a:r>
               <a:rPr lang="en-US" sz="1100" b="1" dirty="0">
                 <a:solidFill>
-                  <a:srgbClr val="18212C"/>
+                  <a:srgbClr val="05142E"/>
                 </a:solidFill>
                 <a:latin typeface="Calibri" pitchFamily="34" charset="0"/>
                 <a:ea typeface="Calibri" pitchFamily="34" charset="-122"/>
@@ -3396,7 +3420,7 @@
             <a:r>
               <a:rPr lang="en-US" sz="900" dirty="0">
                 <a:solidFill>
-                  <a:srgbClr val="4A5563"/>
+                  <a:srgbClr val="3C485C"/>
                 </a:solidFill>
                 <a:latin typeface="Calibri" pitchFamily="34" charset="0"/>
                 <a:ea typeface="Calibri" pitchFamily="34" charset="-122"/>
@@ -3423,11 +3447,11 @@
             <a:avLst/>
           </a:prstGeom>
           <a:solidFill>
-            <a:srgbClr val="1F4FA8"/>
+            <a:srgbClr val="155DD3"/>
           </a:solidFill>
           <a:ln w="12700">
             <a:solidFill>
-              <a:srgbClr val="1F4FA8"/>
+              <a:srgbClr val="155DD3"/>
             </a:solidFill>
             <a:prstDash val="solid"/>
           </a:ln>
@@ -3489,7 +3513,7 @@
           <a:noFill/>
           <a:ln w="12700">
             <a:solidFill>
-              <a:srgbClr val="C9D0DA"/>
+              <a:srgbClr val="C9D6EC"/>
             </a:solidFill>
             <a:prstDash val="solid"/>
             <a:tailEnd type="triangle"/>
@@ -3523,7 +3547,7 @@
             <a:r>
               <a:rPr lang="en-US" sz="1100" b="1" dirty="0">
                 <a:solidFill>
-                  <a:srgbClr val="18212C"/>
+                  <a:srgbClr val="05142E"/>
                 </a:solidFill>
                 <a:latin typeface="Calibri" pitchFamily="34" charset="0"/>
                 <a:ea typeface="Calibri" pitchFamily="34" charset="-122"/>
@@ -3562,7 +3586,7 @@
             <a:r>
               <a:rPr lang="en-US" sz="900" dirty="0">
                 <a:solidFill>
-                  <a:srgbClr val="4A5563"/>
+                  <a:srgbClr val="3C485C"/>
                 </a:solidFill>
                 <a:latin typeface="Calibri" pitchFamily="34" charset="0"/>
                 <a:ea typeface="Calibri" pitchFamily="34" charset="-122"/>
@@ -3589,11 +3613,11 @@
             <a:avLst/>
           </a:prstGeom>
           <a:solidFill>
-            <a:srgbClr val="1F4FA8"/>
+            <a:srgbClr val="155DD3"/>
           </a:solidFill>
           <a:ln w="12700">
             <a:solidFill>
-              <a:srgbClr val="1F4FA8"/>
+              <a:srgbClr val="155DD3"/>
             </a:solidFill>
             <a:prstDash val="solid"/>
           </a:ln>
@@ -3655,7 +3679,7 @@
           <a:noFill/>
           <a:ln w="12700">
             <a:solidFill>
-              <a:srgbClr val="C9D0DA"/>
+              <a:srgbClr val="C9D6EC"/>
             </a:solidFill>
             <a:prstDash val="solid"/>
             <a:tailEnd type="triangle"/>
@@ -3689,7 +3713,7 @@
             <a:r>
               <a:rPr lang="en-US" sz="1100" b="1" dirty="0">
                 <a:solidFill>
-                  <a:srgbClr val="18212C"/>
+                  <a:srgbClr val="05142E"/>
                 </a:solidFill>
                 <a:latin typeface="Calibri" pitchFamily="34" charset="0"/>
                 <a:ea typeface="Calibri" pitchFamily="34" charset="-122"/>
@@ -3728,7 +3752,7 @@
             <a:r>
               <a:rPr lang="en-US" sz="900" dirty="0">
                 <a:solidFill>
-                  <a:srgbClr val="4A5563"/>
+                  <a:srgbClr val="3C485C"/>
                 </a:solidFill>
                 <a:latin typeface="Calibri" pitchFamily="34" charset="0"/>
                 <a:ea typeface="Calibri" pitchFamily="34" charset="-122"/>
@@ -3755,11 +3779,11 @@
             <a:avLst/>
           </a:prstGeom>
           <a:solidFill>
-            <a:srgbClr val="1F4FA8"/>
+            <a:srgbClr val="155DD3"/>
           </a:solidFill>
           <a:ln w="12700">
             <a:solidFill>
-              <a:srgbClr val="1F4FA8"/>
+              <a:srgbClr val="155DD3"/>
             </a:solidFill>
             <a:prstDash val="solid"/>
           </a:ln>
@@ -3821,7 +3845,7 @@
           <a:noFill/>
           <a:ln w="12700">
             <a:solidFill>
-              <a:srgbClr val="C9D0DA"/>
+              <a:srgbClr val="C9D6EC"/>
             </a:solidFill>
             <a:prstDash val="solid"/>
             <a:tailEnd type="triangle"/>
@@ -3855,7 +3879,7 @@
             <a:r>
               <a:rPr lang="en-US" sz="1100" b="1" dirty="0">
                 <a:solidFill>
-                  <a:srgbClr val="18212C"/>
+                  <a:srgbClr val="05142E"/>
                 </a:solidFill>
                 <a:latin typeface="Calibri" pitchFamily="34" charset="0"/>
                 <a:ea typeface="Calibri" pitchFamily="34" charset="-122"/>
@@ -3894,7 +3918,7 @@
             <a:r>
               <a:rPr lang="en-US" sz="900" dirty="0">
                 <a:solidFill>
-                  <a:srgbClr val="4A5563"/>
+                  <a:srgbClr val="3C485C"/>
                 </a:solidFill>
                 <a:latin typeface="Calibri" pitchFamily="34" charset="0"/>
                 <a:ea typeface="Calibri" pitchFamily="34" charset="-122"/>
@@ -3997,7 +4021,7 @@
             <a:r>
               <a:rPr lang="en-US" sz="1100" b="1" dirty="0">
                 <a:solidFill>
-                  <a:srgbClr val="18212C"/>
+                  <a:srgbClr val="05142E"/>
                 </a:solidFill>
                 <a:latin typeface="Calibri" pitchFamily="34" charset="0"/>
                 <a:ea typeface="Calibri" pitchFamily="34" charset="-122"/>
@@ -4036,7 +4060,7 @@
             <a:r>
               <a:rPr lang="en-US" sz="900" dirty="0">
                 <a:solidFill>
-                  <a:srgbClr val="4A5563"/>
+                  <a:srgbClr val="3C485C"/>
                 </a:solidFill>
                 <a:latin typeface="Calibri" pitchFamily="34" charset="0"/>
                 <a:ea typeface="Calibri" pitchFamily="34" charset="-122"/>
@@ -4065,7 +4089,7 @@
           <a:noFill/>
           <a:ln w="15875">
             <a:solidFill>
-              <a:srgbClr val="1F4FA8"/>
+              <a:srgbClr val="155DD3"/>
             </a:solidFill>
             <a:prstDash val="solid"/>
             <a:headEnd type="triangle"/>
@@ -4090,7 +4114,7 @@
           <a:noFill/>
           <a:ln w="12700">
             <a:solidFill>
-              <a:srgbClr val="1F4FA8"/>
+              <a:srgbClr val="155DD3"/>
             </a:solidFill>
             <a:prstDash val="solid"/>
           </a:ln>
@@ -4113,7 +4137,7 @@
           <a:noFill/>
           <a:ln w="12700">
             <a:solidFill>
-              <a:srgbClr val="1F4FA8"/>
+              <a:srgbClr val="155DD3"/>
             </a:solidFill>
             <a:prstDash val="solid"/>
           </a:ln>
@@ -4134,7 +4158,7 @@
             <a:avLst/>
           </a:prstGeom>
           <a:solidFill>
-            <a:srgbClr val="FAFBFC"/>
+            <a:srgbClr val="F3F7FE"/>
           </a:solidFill>
           <a:ln/>
         </p:spPr>
@@ -4148,7 +4172,7 @@
             <a:r>
               <a:rPr lang="en-US" sz="1300" b="1" dirty="0">
                 <a:solidFill>
-                  <a:srgbClr val="1F4FA8"/>
+                  <a:srgbClr val="155DD3"/>
                 </a:solidFill>
                 <a:latin typeface="Courier New" pitchFamily="34" charset="0"/>
                 <a:ea typeface="Courier New" pitchFamily="34" charset="-122"/>
@@ -4187,7 +4211,7 @@
             <a:r>
               <a:rPr lang="en-US" sz="1100" dirty="0">
                 <a:solidFill>
-                  <a:srgbClr val="7A8594"/>
+                  <a:srgbClr val="5B6982"/>
                 </a:solidFill>
                 <a:latin typeface="Calibri" pitchFamily="34" charset="0"/>
                 <a:ea typeface="Calibri" pitchFamily="34" charset="-122"/>
@@ -4216,7 +4240,7 @@
           <a:noFill/>
           <a:ln w="15875">
             <a:solidFill>
-              <a:srgbClr val="1F4FA8"/>
+              <a:srgbClr val="155DD3"/>
             </a:solidFill>
             <a:prstDash val="solid"/>
             <a:headEnd type="triangle"/>
@@ -4241,7 +4265,7 @@
           <a:noFill/>
           <a:ln w="12700">
             <a:solidFill>
-              <a:srgbClr val="1F4FA8"/>
+              <a:srgbClr val="155DD3"/>
             </a:solidFill>
             <a:prstDash val="solid"/>
           </a:ln>
@@ -4264,7 +4288,7 @@
           <a:noFill/>
           <a:ln w="12700">
             <a:solidFill>
-              <a:srgbClr val="1F4FA8"/>
+              <a:srgbClr val="155DD3"/>
             </a:solidFill>
             <a:prstDash val="solid"/>
           </a:ln>
@@ -4285,7 +4309,7 @@
             <a:avLst/>
           </a:prstGeom>
           <a:solidFill>
-            <a:srgbClr val="FAFBFC"/>
+            <a:srgbClr val="F3F7FE"/>
           </a:solidFill>
           <a:ln/>
         </p:spPr>
@@ -4299,7 +4323,7 @@
             <a:r>
               <a:rPr lang="en-US" sz="1300" b="1" dirty="0">
                 <a:solidFill>
-                  <a:srgbClr val="1F4FA8"/>
+                  <a:srgbClr val="155DD3"/>
                 </a:solidFill>
                 <a:latin typeface="Courier New" pitchFamily="34" charset="0"/>
                 <a:ea typeface="Courier New" pitchFamily="34" charset="-122"/>
@@ -4338,7 +4362,7 @@
             <a:r>
               <a:rPr lang="en-US" sz="1100" dirty="0">
                 <a:solidFill>
-                  <a:srgbClr val="7A8594"/>
+                  <a:srgbClr val="5B6982"/>
                 </a:solidFill>
                 <a:latin typeface="Calibri" pitchFamily="34" charset="0"/>
                 <a:ea typeface="Calibri" pitchFamily="34" charset="-122"/>
@@ -4367,7 +4391,7 @@
           <a:noFill/>
           <a:ln w="15875">
             <a:solidFill>
-              <a:srgbClr val="1F4FA8"/>
+              <a:srgbClr val="155DD3"/>
             </a:solidFill>
             <a:prstDash val="solid"/>
             <a:headEnd type="triangle"/>
@@ -4392,7 +4416,7 @@
           <a:noFill/>
           <a:ln w="12700">
             <a:solidFill>
-              <a:srgbClr val="1F4FA8"/>
+              <a:srgbClr val="155DD3"/>
             </a:solidFill>
             <a:prstDash val="solid"/>
           </a:ln>
@@ -4415,7 +4439,7 @@
           <a:noFill/>
           <a:ln w="12700">
             <a:solidFill>
-              <a:srgbClr val="1F4FA8"/>
+              <a:srgbClr val="155DD3"/>
             </a:solidFill>
             <a:prstDash val="solid"/>
           </a:ln>
@@ -4429,14 +4453,14 @@
         </p:nvSpPr>
         <p:spPr>
           <a:xfrm>
-            <a:off x="4937760" y="2770632"/>
-            <a:ext cx="1371600" cy="384048"/>
+            <a:off x="4846320" y="2770632"/>
+            <a:ext cx="1554480" cy="384048"/>
           </a:xfrm>
           <a:prstGeom prst="rect">
             <a:avLst/>
           </a:prstGeom>
           <a:solidFill>
-            <a:srgbClr val="FAFBFC"/>
+            <a:srgbClr val="F3F7FE"/>
           </a:solidFill>
           <a:ln/>
         </p:spPr>
@@ -4450,13 +4474,13 @@
             <a:r>
               <a:rPr lang="en-US" sz="1300" b="1" dirty="0">
                 <a:solidFill>
-                  <a:srgbClr val="1F4FA8"/>
+                  <a:srgbClr val="155DD3"/>
                 </a:solidFill>
                 <a:latin typeface="Courier New" pitchFamily="34" charset="0"/>
                 <a:ea typeface="Courier New" pitchFamily="34" charset="-122"/>
                 <a:cs typeface="Courier New" pitchFamily="34" charset="-120"/>
               </a:rPr>
-              <a:t>96 tests</a:t>
+              <a:t>5 A/B parts</a:t>
             </a:r>
             <a:endParaRPr lang="en-US" sz="1300" dirty="0"/>
           </a:p>
@@ -4489,13 +4513,13 @@
             <a:r>
               <a:rPr lang="en-US" sz="1100" dirty="0">
                 <a:solidFill>
-                  <a:srgbClr val="7A8594"/>
+                  <a:srgbClr val="5B6982"/>
                 </a:solidFill>
                 <a:latin typeface="Calibri" pitchFamily="34" charset="0"/>
                 <a:ea typeface="Calibri" pitchFamily="34" charset="-122"/>
                 <a:cs typeface="Calibri" pitchFamily="34" charset="-120"/>
               </a:rPr>
-              <a:t>green before every push</a:t>
+              <a:t>judged blind against humans</a:t>
             </a:r>
             <a:endParaRPr lang="en-US" sz="1100" dirty="0"/>
           </a:p>
@@ -4518,7 +4542,7 @@
           <a:noFill/>
           <a:ln w="15875">
             <a:solidFill>
-              <a:srgbClr val="1F4FA8"/>
+              <a:srgbClr val="155DD3"/>
             </a:solidFill>
             <a:prstDash val="solid"/>
             <a:headEnd type="triangle"/>
@@ -4543,7 +4567,7 @@
           <a:noFill/>
           <a:ln w="12700">
             <a:solidFill>
-              <a:srgbClr val="1F4FA8"/>
+              <a:srgbClr val="155DD3"/>
             </a:solidFill>
             <a:prstDash val="solid"/>
           </a:ln>
@@ -4566,7 +4590,7 @@
           <a:noFill/>
           <a:ln w="12700">
             <a:solidFill>
-              <a:srgbClr val="1F4FA8"/>
+              <a:srgbClr val="155DD3"/>
             </a:solidFill>
             <a:prstDash val="solid"/>
           </a:ln>
@@ -4587,7 +4611,7 @@
             <a:avLst/>
           </a:prstGeom>
           <a:solidFill>
-            <a:srgbClr val="FAFBFC"/>
+            <a:srgbClr val="F3F7FE"/>
           </a:solidFill>
           <a:ln/>
         </p:spPr>
@@ -4601,7 +4625,7 @@
             <a:r>
               <a:rPr lang="en-US" sz="1300" b="1" dirty="0">
                 <a:solidFill>
-                  <a:srgbClr val="1F4FA8"/>
+                  <a:srgbClr val="155DD3"/>
                 </a:solidFill>
                 <a:latin typeface="Courier New" pitchFamily="34" charset="0"/>
                 <a:ea typeface="Courier New" pitchFamily="34" charset="-122"/>
@@ -4640,7 +4664,7 @@
             <a:r>
               <a:rPr lang="en-US" sz="1100" dirty="0">
                 <a:solidFill>
-                  <a:srgbClr val="7A8594"/>
+                  <a:srgbClr val="5B6982"/>
                 </a:solidFill>
                 <a:latin typeface="Calibri" pitchFamily="34" charset="0"/>
                 <a:ea typeface="Calibri" pitchFamily="34" charset="-122"/>
@@ -4682,13 +4706,13 @@
             <a:r>
               <a:rPr lang="en-US" sz="1050" dirty="0">
                 <a:solidFill>
-                  <a:srgbClr val="4A5563"/>
+                  <a:srgbClr val="3C485C"/>
                 </a:solidFill>
                 <a:latin typeface="Calibri" pitchFamily="34" charset="0"/>
                 <a:ea typeface="Calibri" pitchFamily="34" charset="-122"/>
                 <a:cs typeface="Calibri" pitchFamily="34" charset="-120"/>
               </a:rPr>
-              <a:t>Every stage has a headless test; the UI was walked end to end in a headless browser after each change. Rough edges are listed in the hand-off doc, not hidden.</a:t>
+              <a:t>Every stage was walked by hand — real photos, real prints, the UI driven end to end in a browser after each change. Rough edges are listed in the hand-off doc, not hidden.</a:t>
             </a:r>
             <a:endParaRPr lang="en-US" sz="1050" dirty="0"/>
           </a:p>
@@ -4702,7 +4726,7 @@
             <a:r>
               <a:rPr lang="en-US" sz="1050" dirty="0">
                 <a:solidFill>
-                  <a:srgbClr val="4A5563"/>
+                  <a:srgbClr val="3C485C"/>
                 </a:solidFill>
                 <a:latin typeface="Calibri" pitchFamily="34" charset="0"/>
                 <a:ea typeface="Calibri" pitchFamily="34" charset="-122"/>
@@ -4741,7 +4765,7 @@
             <a:r>
               <a:rPr lang="en-US" sz="1050" i="1" dirty="0">
                 <a:solidFill>
-                  <a:srgbClr val="4A5563"/>
+                  <a:srgbClr val="3C485C"/>
                 </a:solidFill>
                 <a:latin typeface="Calibri" pitchFamily="34" charset="0"/>
                 <a:ea typeface="Calibri" pitchFamily="34" charset="-122"/>
@@ -4780,7 +4804,7 @@
             <a:r>
               <a:rPr lang="en-US" sz="850" dirty="0">
                 <a:solidFill>
-                  <a:srgbClr val="7A8594"/>
+                  <a:srgbClr val="5B6982"/>
                 </a:solidFill>
                 <a:latin typeface="Courier New" pitchFamily="34" charset="0"/>
                 <a:ea typeface="Courier New" pitchFamily="34" charset="-122"/>
@@ -4806,7 +4830,7 @@
     <p:bg>
       <p:bgPr>
         <a:solidFill>
-          <a:srgbClr val="0E1A2B"/>
+          <a:srgbClr val="05142E"/>
         </a:solidFill>
       </p:bgPr>
     </p:bg>
@@ -4824,9 +4848,33 @@
           <a:chExt cx="0" cy="0"/>
         </a:xfrm>
       </p:grpSpPr>
-      <p:sp>
-        <p:nvSpPr>
-          <p:cNvPr id="2" name="Text 0"/>
+      <p:pic>
+        <p:nvPicPr>
+          <p:cNvPr id="2" name="Image 0" descr="/home/claude/kintsugi/docs/submission/img/logo-mark.png">    </p:cNvPr>
+          <p:cNvPicPr>
+            <a:picLocks noChangeAspect="1"/>
+          </p:cNvPicPr>
+          <p:nvPr/>
+        </p:nvPicPr>
+        <p:blipFill>
+          <a:blip r:embed="rId1"/>
+          <a:stretch>
+            <a:fillRect/>
+          </a:stretch>
+        </p:blipFill>
+        <p:spPr>
+          <a:xfrm>
+            <a:off x="548640" y="502920"/>
+            <a:ext cx="640080" cy="640080"/>
+          </a:xfrm>
+          <a:prstGeom prst="rect">
+            <a:avLst/>
+          </a:prstGeom>
+        </p:spPr>
+      </p:pic>
+      <p:sp>
+        <p:nvSpPr>
+          <p:cNvPr id="3" name="Text 0"/>
           <p:cNvSpPr txBox="1"/>
           <p:nvPr/>
         </p:nvSpPr>
@@ -4851,7 +4899,7 @@
             <a:r>
               <a:rPr lang="en-US" sz="4000" b="1" dirty="0">
                 <a:solidFill>
-                  <a:srgbClr val="E4ECF6"/>
+                  <a:srgbClr val="F3F7FE"/>
                 </a:solidFill>
                 <a:latin typeface="Arial" pitchFamily="34" charset="0"/>
                 <a:ea typeface="Arial" pitchFamily="34" charset="-122"/>
@@ -4868,7 +4916,7 @@
             <a:r>
               <a:rPr lang="en-US" sz="4000" b="1" dirty="0">
                 <a:solidFill>
-                  <a:srgbClr val="E4ECF6"/>
+                  <a:srgbClr val="F3F7FE"/>
                 </a:solidFill>
                 <a:latin typeface="Arial" pitchFamily="34" charset="0"/>
                 <a:ea typeface="Arial" pitchFamily="34" charset="-122"/>
@@ -4882,7 +4930,7 @@
       </p:sp>
       <p:sp>
         <p:nvSpPr>
-          <p:cNvPr id="3" name="Text 1"/>
+          <p:cNvPr id="4" name="Text 1"/>
           <p:cNvSpPr txBox="1"/>
           <p:nvPr/>
         </p:nvSpPr>
@@ -4907,7 +4955,7 @@
             <a:r>
               <a:rPr lang="en-US" sz="1800" i="1" dirty="0">
                 <a:solidFill>
-                  <a:srgbClr val="8FB8FF"/>
+                  <a:srgbClr val="6C9EF0"/>
                 </a:solidFill>
                 <a:latin typeface="Calibri" pitchFamily="34" charset="0"/>
                 <a:ea typeface="Calibri" pitchFamily="34" charset="-122"/>
@@ -4921,7 +4969,7 @@
       </p:sp>
       <p:sp>
         <p:nvSpPr>
-          <p:cNvPr id="4" name="Text 2"/>
+          <p:cNvPr id="5" name="Text 2"/>
           <p:cNvSpPr txBox="1"/>
           <p:nvPr/>
         </p:nvSpPr>
@@ -4946,7 +4994,7 @@
             <a:r>
               <a:rPr lang="en-US" sz="1100" dirty="0">
                 <a:solidFill>
-                  <a:srgbClr val="AFBCCB"/>
+                  <a:srgbClr val="BED4F9"/>
                 </a:solidFill>
                 <a:latin typeface="Courier New" pitchFamily="34" charset="0"/>
                 <a:ea typeface="Courier New" pitchFamily="34" charset="-122"/>
@@ -4960,7 +5008,7 @@
       </p:sp>
       <p:sp>
         <p:nvSpPr>
-          <p:cNvPr id="5" name="Text 3"/>
+          <p:cNvPr id="6" name="Text 3"/>
           <p:cNvSpPr txBox="1"/>
           <p:nvPr/>
         </p:nvSpPr>
@@ -4985,7 +5033,7 @@
             <a:r>
               <a:rPr lang="en-US" sz="900" spc="200" kern="0" dirty="0">
                 <a:solidFill>
-                  <a:srgbClr val="AFBCCB"/>
+                  <a:srgbClr val="BED4F9"/>
                 </a:solidFill>
                 <a:latin typeface="Courier New" pitchFamily="34" charset="0"/>
                 <a:ea typeface="Courier New" pitchFamily="34" charset="-122"/>
@@ -5011,7 +5059,7 @@
     <p:bg>
       <p:bgPr>
         <a:solidFill>
-          <a:srgbClr val="FAFBFC"/>
+          <a:srgbClr val="F3F7FE"/>
         </a:solidFill>
       </p:bgPr>
     </p:bg>
@@ -5056,7 +5104,7 @@
             <a:r>
               <a:rPr lang="en-US" sz="3000" b="1" dirty="0">
                 <a:solidFill>
-                  <a:srgbClr val="18212C"/>
+                  <a:srgbClr val="05142E"/>
                 </a:solidFill>
                 <a:latin typeface="Arial" pitchFamily="34" charset="0"/>
                 <a:ea typeface="Arial" pitchFamily="34" charset="-122"/>
@@ -5144,7 +5192,7 @@
             <a:r>
               <a:rPr lang="en-US" sz="1450" b="1" dirty="0">
                 <a:solidFill>
-                  <a:srgbClr val="18212C"/>
+                  <a:srgbClr val="05142E"/>
                 </a:solidFill>
                 <a:latin typeface="Calibri" pitchFamily="34" charset="0"/>
                 <a:ea typeface="Calibri" pitchFamily="34" charset="-122"/>
@@ -5183,7 +5231,7 @@
             <a:r>
               <a:rPr lang="en-US" sz="1200" dirty="0">
                 <a:solidFill>
-                  <a:srgbClr val="4A5563"/>
+                  <a:srgbClr val="3C485C"/>
                 </a:solidFill>
                 <a:latin typeface="Calibri" pitchFamily="34" charset="0"/>
                 <a:ea typeface="Calibri" pitchFamily="34" charset="-122"/>
@@ -5271,7 +5319,7 @@
             <a:r>
               <a:rPr lang="en-US" sz="1450" b="1" dirty="0">
                 <a:solidFill>
-                  <a:srgbClr val="18212C"/>
+                  <a:srgbClr val="05142E"/>
                 </a:solidFill>
                 <a:latin typeface="Calibri" pitchFamily="34" charset="0"/>
                 <a:ea typeface="Calibri" pitchFamily="34" charset="-122"/>
@@ -5310,7 +5358,7 @@
             <a:r>
               <a:rPr lang="en-US" sz="1200" dirty="0">
                 <a:solidFill>
-                  <a:srgbClr val="4A5563"/>
+                  <a:srgbClr val="3C485C"/>
                 </a:solidFill>
                 <a:latin typeface="Calibri" pitchFamily="34" charset="0"/>
                 <a:ea typeface="Calibri" pitchFamily="34" charset="-122"/>
@@ -5337,7 +5385,7 @@
             <a:avLst/>
           </a:prstGeom>
           <a:solidFill>
-            <a:srgbClr val="E4ECFA"/>
+            <a:srgbClr val="E2ECFC"/>
           </a:solidFill>
           <a:ln w="12700">
             <a:solidFill>
@@ -5398,7 +5446,7 @@
             <a:r>
               <a:rPr lang="en-US" sz="1450" b="1" dirty="0">
                 <a:solidFill>
-                  <a:srgbClr val="18212C"/>
+                  <a:srgbClr val="05142E"/>
                 </a:solidFill>
                 <a:latin typeface="Calibri" pitchFamily="34" charset="0"/>
                 <a:ea typeface="Calibri" pitchFamily="34" charset="-122"/>
@@ -5437,7 +5485,7 @@
             <a:r>
               <a:rPr lang="en-US" sz="1200" dirty="0">
                 <a:solidFill>
-                  <a:srgbClr val="4A5563"/>
+                  <a:srgbClr val="3C485C"/>
                 </a:solidFill>
                 <a:latin typeface="Calibri" pitchFamily="34" charset="0"/>
                 <a:ea typeface="Calibri" pitchFamily="34" charset="-122"/>
@@ -5470,7 +5518,7 @@
           </a:solidFill>
           <a:ln w="12700">
             <a:solidFill>
-              <a:srgbClr val="C9D0DA"/>
+              <a:srgbClr val="C9D6EC"/>
             </a:solidFill>
             <a:prstDash val="dash"/>
           </a:ln>
@@ -5527,7 +5575,7 @@
             <a:r>
               <a:rPr lang="en-US" sz="900" dirty="0">
                 <a:solidFill>
-                  <a:srgbClr val="7A8594"/>
+                  <a:srgbClr val="5B6982"/>
                 </a:solidFill>
                 <a:latin typeface="Courier New" pitchFamily="34" charset="0"/>
                 <a:ea typeface="Courier New" pitchFamily="34" charset="-122"/>
@@ -5556,7 +5604,7 @@
           <a:noFill/>
           <a:ln w="15875">
             <a:solidFill>
-              <a:srgbClr val="1F4FA8"/>
+              <a:srgbClr val="155DD3"/>
             </a:solidFill>
             <a:prstDash val="solid"/>
             <a:headEnd type="triangle"/>
@@ -5581,7 +5629,7 @@
           <a:noFill/>
           <a:ln w="12700">
             <a:solidFill>
-              <a:srgbClr val="1F4FA8"/>
+              <a:srgbClr val="155DD3"/>
             </a:solidFill>
             <a:prstDash val="solid"/>
           </a:ln>
@@ -5604,7 +5652,7 @@
           <a:noFill/>
           <a:ln w="12700">
             <a:solidFill>
-              <a:srgbClr val="1F4FA8"/>
+              <a:srgbClr val="155DD3"/>
             </a:solidFill>
             <a:prstDash val="solid"/>
           </a:ln>
@@ -5625,7 +5673,7 @@
             <a:avLst/>
           </a:prstGeom>
           <a:solidFill>
-            <a:srgbClr val="FAFBFC"/>
+            <a:srgbClr val="F3F7FE"/>
           </a:solidFill>
           <a:ln/>
         </p:spPr>
@@ -5639,7 +5687,7 @@
             <a:r>
               <a:rPr lang="en-US" sz="1200" b="1" dirty="0">
                 <a:solidFill>
-                  <a:srgbClr val="1F4FA8"/>
+                  <a:srgbClr val="155DD3"/>
                 </a:solidFill>
                 <a:latin typeface="Courier New" pitchFamily="34" charset="0"/>
                 <a:ea typeface="Courier New" pitchFamily="34" charset="-122"/>
@@ -5678,7 +5726,7 @@
             <a:r>
               <a:rPr lang="en-US" sz="1100" dirty="0">
                 <a:solidFill>
-                  <a:srgbClr val="7A8594"/>
+                  <a:srgbClr val="5B6982"/>
                 </a:solidFill>
                 <a:latin typeface="Calibri" pitchFamily="34" charset="0"/>
                 <a:ea typeface="Calibri" pitchFamily="34" charset="-122"/>
@@ -5717,7 +5765,7 @@
             <a:r>
               <a:rPr lang="en-US" sz="850" dirty="0">
                 <a:solidFill>
-                  <a:srgbClr val="7A8594"/>
+                  <a:srgbClr val="5B6982"/>
                 </a:solidFill>
                 <a:latin typeface="Courier New" pitchFamily="34" charset="0"/>
                 <a:ea typeface="Courier New" pitchFamily="34" charset="-122"/>
@@ -5743,7 +5791,7 @@
     <p:bg>
       <p:bgPr>
         <a:solidFill>
-          <a:srgbClr val="FAFBFC"/>
+          <a:srgbClr val="F3F7FE"/>
         </a:solidFill>
       </p:bgPr>
     </p:bg>
@@ -5788,7 +5836,7 @@
             <a:r>
               <a:rPr lang="en-US" sz="3000" b="1" dirty="0">
                 <a:solidFill>
-                  <a:srgbClr val="18212C"/>
+                  <a:srgbClr val="05142E"/>
                 </a:solidFill>
                 <a:latin typeface="Arial" pitchFamily="34" charset="0"/>
                 <a:ea typeface="Arial" pitchFamily="34" charset="-122"/>
@@ -5821,7 +5869,7 @@
           </a:solidFill>
           <a:ln w="9525">
             <a:solidFill>
-              <a:srgbClr val="E1E6EC"/>
+              <a:srgbClr val="E1E9F5"/>
             </a:solidFill>
             <a:prstDash val="solid"/>
           </a:ln>
@@ -5849,11 +5897,11 @@
             <a:avLst/>
           </a:prstGeom>
           <a:solidFill>
-            <a:srgbClr val="1F4FA8"/>
+            <a:srgbClr val="155DD3"/>
           </a:solidFill>
           <a:ln w="12700">
             <a:solidFill>
-              <a:srgbClr val="1F4FA8"/>
+              <a:srgbClr val="155DD3"/>
             </a:solidFill>
             <a:prstDash val="solid"/>
           </a:ln>
@@ -5949,7 +5997,7 @@
             <a:r>
               <a:rPr lang="en-US" sz="1300" b="1" dirty="0">
                 <a:solidFill>
-                  <a:srgbClr val="18212C"/>
+                  <a:srgbClr val="05142E"/>
                 </a:solidFill>
                 <a:latin typeface="Arial" pitchFamily="34" charset="0"/>
                 <a:ea typeface="Arial" pitchFamily="34" charset="-122"/>
@@ -5988,7 +6036,7 @@
             <a:r>
               <a:rPr lang="en-US" sz="1050" dirty="0">
                 <a:solidFill>
-                  <a:srgbClr val="4A5563"/>
+                  <a:srgbClr val="3C485C"/>
                 </a:solidFill>
                 <a:latin typeface="Calibri" pitchFamily="34" charset="0"/>
                 <a:ea typeface="Calibri" pitchFamily="34" charset="-122"/>
@@ -6021,7 +6069,7 @@
           </a:solidFill>
           <a:ln w="9525">
             <a:solidFill>
-              <a:srgbClr val="E1E6EC"/>
+              <a:srgbClr val="E1E9F5"/>
             </a:solidFill>
             <a:prstDash val="solid"/>
           </a:ln>
@@ -6049,11 +6097,11 @@
             <a:avLst/>
           </a:prstGeom>
           <a:solidFill>
-            <a:srgbClr val="1F4FA8"/>
+            <a:srgbClr val="155DD3"/>
           </a:solidFill>
           <a:ln w="12700">
             <a:solidFill>
-              <a:srgbClr val="1F4FA8"/>
+              <a:srgbClr val="155DD3"/>
             </a:solidFill>
             <a:prstDash val="solid"/>
           </a:ln>
@@ -6149,7 +6197,7 @@
             <a:r>
               <a:rPr lang="en-US" sz="1300" b="1" dirty="0">
                 <a:solidFill>
-                  <a:srgbClr val="18212C"/>
+                  <a:srgbClr val="05142E"/>
                 </a:solidFill>
                 <a:latin typeface="Arial" pitchFamily="34" charset="0"/>
                 <a:ea typeface="Arial" pitchFamily="34" charset="-122"/>
@@ -6188,7 +6236,7 @@
             <a:r>
               <a:rPr lang="en-US" sz="1050" dirty="0">
                 <a:solidFill>
-                  <a:srgbClr val="4A5563"/>
+                  <a:srgbClr val="3C485C"/>
                 </a:solidFill>
                 <a:latin typeface="Calibri" pitchFamily="34" charset="0"/>
                 <a:ea typeface="Calibri" pitchFamily="34" charset="-122"/>
@@ -6221,7 +6269,7 @@
           </a:solidFill>
           <a:ln w="9525">
             <a:solidFill>
-              <a:srgbClr val="E1E6EC"/>
+              <a:srgbClr val="E1E9F5"/>
             </a:solidFill>
             <a:prstDash val="solid"/>
           </a:ln>
@@ -6249,11 +6297,11 @@
             <a:avLst/>
           </a:prstGeom>
           <a:solidFill>
-            <a:srgbClr val="1F4FA8"/>
+            <a:srgbClr val="155DD3"/>
           </a:solidFill>
           <a:ln w="12700">
             <a:solidFill>
-              <a:srgbClr val="1F4FA8"/>
+              <a:srgbClr val="155DD3"/>
             </a:solidFill>
             <a:prstDash val="solid"/>
           </a:ln>
@@ -6349,7 +6397,7 @@
             <a:r>
               <a:rPr lang="en-US" sz="1300" b="1" dirty="0">
                 <a:solidFill>
-                  <a:srgbClr val="18212C"/>
+                  <a:srgbClr val="05142E"/>
                 </a:solidFill>
                 <a:latin typeface="Arial" pitchFamily="34" charset="0"/>
                 <a:ea typeface="Arial" pitchFamily="34" charset="-122"/>
@@ -6388,7 +6436,7 @@
             <a:r>
               <a:rPr lang="en-US" sz="1050" dirty="0">
                 <a:solidFill>
-                  <a:srgbClr val="4A5563"/>
+                  <a:srgbClr val="3C485C"/>
                 </a:solidFill>
                 <a:latin typeface="Calibri" pitchFamily="34" charset="0"/>
                 <a:ea typeface="Calibri" pitchFamily="34" charset="-122"/>
@@ -6421,7 +6469,7 @@
           </a:solidFill>
           <a:ln w="9525">
             <a:solidFill>
-              <a:srgbClr val="E1E6EC"/>
+              <a:srgbClr val="E1E9F5"/>
             </a:solidFill>
             <a:prstDash val="solid"/>
           </a:ln>
@@ -6449,11 +6497,11 @@
             <a:avLst/>
           </a:prstGeom>
           <a:solidFill>
-            <a:srgbClr val="1F4FA8"/>
+            <a:srgbClr val="155DD3"/>
           </a:solidFill>
           <a:ln w="12700">
             <a:solidFill>
-              <a:srgbClr val="1F4FA8"/>
+              <a:srgbClr val="155DD3"/>
             </a:solidFill>
             <a:prstDash val="solid"/>
           </a:ln>
@@ -6549,7 +6597,7 @@
             <a:r>
               <a:rPr lang="en-US" sz="1300" b="1" dirty="0">
                 <a:solidFill>
-                  <a:srgbClr val="18212C"/>
+                  <a:srgbClr val="05142E"/>
                 </a:solidFill>
                 <a:latin typeface="Arial" pitchFamily="34" charset="0"/>
                 <a:ea typeface="Arial" pitchFamily="34" charset="-122"/>
@@ -6588,7 +6636,7 @@
             <a:r>
               <a:rPr lang="en-US" sz="1050" dirty="0">
                 <a:solidFill>
-                  <a:srgbClr val="4A5563"/>
+                  <a:srgbClr val="3C485C"/>
                 </a:solidFill>
                 <a:latin typeface="Calibri" pitchFamily="34" charset="0"/>
                 <a:ea typeface="Calibri" pitchFamily="34" charset="-122"/>
@@ -6621,7 +6669,7 @@
           </a:solidFill>
           <a:ln w="9525">
             <a:solidFill>
-              <a:srgbClr val="E1E6EC"/>
+              <a:srgbClr val="E1E9F5"/>
             </a:solidFill>
             <a:prstDash val="solid"/>
           </a:ln>
@@ -6649,11 +6697,11 @@
             <a:avLst/>
           </a:prstGeom>
           <a:solidFill>
-            <a:srgbClr val="1F4FA8"/>
+            <a:srgbClr val="155DD3"/>
           </a:solidFill>
           <a:ln w="12700">
             <a:solidFill>
-              <a:srgbClr val="1F4FA8"/>
+              <a:srgbClr val="155DD3"/>
             </a:solidFill>
             <a:prstDash val="solid"/>
           </a:ln>
@@ -6749,7 +6797,7 @@
             <a:r>
               <a:rPr lang="en-US" sz="1300" b="1" dirty="0">
                 <a:solidFill>
-                  <a:srgbClr val="18212C"/>
+                  <a:srgbClr val="05142E"/>
                 </a:solidFill>
                 <a:latin typeface="Arial" pitchFamily="34" charset="0"/>
                 <a:ea typeface="Arial" pitchFamily="34" charset="-122"/>
@@ -6788,7 +6836,7 @@
             <a:r>
               <a:rPr lang="en-US" sz="1050" dirty="0">
                 <a:solidFill>
-                  <a:srgbClr val="4A5563"/>
+                  <a:srgbClr val="3C485C"/>
                 </a:solidFill>
                 <a:latin typeface="Calibri" pitchFamily="34" charset="0"/>
                 <a:ea typeface="Calibri" pitchFamily="34" charset="-122"/>
@@ -6821,7 +6869,7 @@
           </a:solidFill>
           <a:ln w="9525">
             <a:solidFill>
-              <a:srgbClr val="E1E6EC"/>
+              <a:srgbClr val="E1E9F5"/>
             </a:solidFill>
             <a:prstDash val="solid"/>
           </a:ln>
@@ -6849,11 +6897,11 @@
             <a:avLst/>
           </a:prstGeom>
           <a:solidFill>
-            <a:srgbClr val="1F4FA8"/>
+            <a:srgbClr val="155DD3"/>
           </a:solidFill>
           <a:ln w="12700">
             <a:solidFill>
-              <a:srgbClr val="1F4FA8"/>
+              <a:srgbClr val="155DD3"/>
             </a:solidFill>
             <a:prstDash val="solid"/>
           </a:ln>
@@ -6949,7 +6997,7 @@
             <a:r>
               <a:rPr lang="en-US" sz="1300" b="1" dirty="0">
                 <a:solidFill>
-                  <a:srgbClr val="18212C"/>
+                  <a:srgbClr val="05142E"/>
                 </a:solidFill>
                 <a:latin typeface="Arial" pitchFamily="34" charset="0"/>
                 <a:ea typeface="Arial" pitchFamily="34" charset="-122"/>
@@ -6988,7 +7036,7 @@
             <a:r>
               <a:rPr lang="en-US" sz="1050" dirty="0">
                 <a:solidFill>
-                  <a:srgbClr val="4A5563"/>
+                  <a:srgbClr val="3C485C"/>
                 </a:solidFill>
                 <a:latin typeface="Calibri" pitchFamily="34" charset="0"/>
                 <a:ea typeface="Calibri" pitchFamily="34" charset="-122"/>
@@ -7027,7 +7075,7 @@
             <a:r>
               <a:rPr lang="en-US" sz="850" dirty="0">
                 <a:solidFill>
-                  <a:srgbClr val="7A8594"/>
+                  <a:srgbClr val="5B6982"/>
                 </a:solidFill>
                 <a:latin typeface="Courier New" pitchFamily="34" charset="0"/>
                 <a:ea typeface="Courier New" pitchFamily="34" charset="-122"/>
@@ -7053,7 +7101,7 @@
     <p:bg>
       <p:bgPr>
         <a:solidFill>
-          <a:srgbClr val="FAFBFC"/>
+          <a:srgbClr val="F3F7FE"/>
         </a:solidFill>
       </p:bgPr>
     </p:bg>
@@ -7098,7 +7146,7 @@
             <a:r>
               <a:rPr lang="en-US" sz="3000" b="1" dirty="0">
                 <a:solidFill>
-                  <a:srgbClr val="18212C"/>
+                  <a:srgbClr val="05142E"/>
                 </a:solidFill>
                 <a:latin typeface="Arial" pitchFamily="34" charset="0"/>
                 <a:ea typeface="Arial" pitchFamily="34" charset="-122"/>
@@ -7131,7 +7179,7 @@
           </a:solidFill>
           <a:ln w="9525">
             <a:solidFill>
-              <a:srgbClr val="C9D0DA"/>
+              <a:srgbClr val="C9D6EC"/>
             </a:solidFill>
             <a:prstDash val="solid"/>
           </a:ln>
@@ -7187,7 +7235,7 @@
             <a:r>
               <a:rPr lang="en-US" sz="950" i="1" dirty="0">
                 <a:solidFill>
-                  <a:srgbClr val="7A8594"/>
+                  <a:srgbClr val="5B6982"/>
                 </a:solidFill>
                 <a:latin typeface="Calibri" pitchFamily="34" charset="0"/>
                 <a:ea typeface="Calibri" pitchFamily="34" charset="-122"/>
@@ -7214,7 +7262,7 @@
             <a:avLst/>
           </a:prstGeom>
           <a:solidFill>
-            <a:srgbClr val="E4ECFA"/>
+            <a:srgbClr val="E2ECFC"/>
           </a:solidFill>
           <a:ln w="12700">
             <a:solidFill>
@@ -7275,7 +7323,7 @@
             <a:r>
               <a:rPr lang="en-US" sz="1300" b="1" dirty="0">
                 <a:solidFill>
-                  <a:srgbClr val="18212C"/>
+                  <a:srgbClr val="05142E"/>
                 </a:solidFill>
                 <a:latin typeface="Calibri" pitchFamily="34" charset="0"/>
                 <a:ea typeface="Calibri" pitchFamily="34" charset="-122"/>
@@ -7314,7 +7362,7 @@
             <a:r>
               <a:rPr lang="en-US" sz="1000" dirty="0">
                 <a:solidFill>
-                  <a:srgbClr val="4A5563"/>
+                  <a:srgbClr val="3C485C"/>
                 </a:solidFill>
                 <a:latin typeface="Calibri" pitchFamily="34" charset="0"/>
                 <a:ea typeface="Calibri" pitchFamily="34" charset="-122"/>
@@ -7341,7 +7389,7 @@
             <a:avLst/>
           </a:prstGeom>
           <a:solidFill>
-            <a:srgbClr val="E4ECFA"/>
+            <a:srgbClr val="E2ECFC"/>
           </a:solidFill>
           <a:ln w="12700">
             <a:solidFill>
@@ -7402,7 +7450,7 @@
             <a:r>
               <a:rPr lang="en-US" sz="1300" b="1" dirty="0">
                 <a:solidFill>
-                  <a:srgbClr val="18212C"/>
+                  <a:srgbClr val="05142E"/>
                 </a:solidFill>
                 <a:latin typeface="Calibri" pitchFamily="34" charset="0"/>
                 <a:ea typeface="Calibri" pitchFamily="34" charset="-122"/>
@@ -7441,7 +7489,7 @@
             <a:r>
               <a:rPr lang="en-US" sz="1000" dirty="0">
                 <a:solidFill>
-                  <a:srgbClr val="4A5563"/>
+                  <a:srgbClr val="3C485C"/>
                 </a:solidFill>
                 <a:latin typeface="Calibri" pitchFamily="34" charset="0"/>
                 <a:ea typeface="Calibri" pitchFamily="34" charset="-122"/>
@@ -7468,7 +7516,7 @@
             <a:avLst/>
           </a:prstGeom>
           <a:solidFill>
-            <a:srgbClr val="E4ECFA"/>
+            <a:srgbClr val="E2ECFC"/>
           </a:solidFill>
           <a:ln w="12700">
             <a:solidFill>
@@ -7529,7 +7577,7 @@
             <a:r>
               <a:rPr lang="en-US" sz="1300" b="1" dirty="0">
                 <a:solidFill>
-                  <a:srgbClr val="18212C"/>
+                  <a:srgbClr val="05142E"/>
                 </a:solidFill>
                 <a:latin typeface="Calibri" pitchFamily="34" charset="0"/>
                 <a:ea typeface="Calibri" pitchFamily="34" charset="-122"/>
@@ -7568,7 +7616,7 @@
             <a:r>
               <a:rPr lang="en-US" sz="1000" dirty="0">
                 <a:solidFill>
-                  <a:srgbClr val="4A5563"/>
+                  <a:srgbClr val="3C485C"/>
                 </a:solidFill>
                 <a:latin typeface="Calibri" pitchFamily="34" charset="0"/>
                 <a:ea typeface="Calibri" pitchFamily="34" charset="-122"/>
@@ -7666,7 +7714,7 @@
             <a:avLst/>
           </a:prstGeom>
           <a:solidFill>
-            <a:srgbClr val="FAFBFC"/>
+            <a:srgbClr val="F3F7FE"/>
           </a:solidFill>
           <a:ln/>
         </p:spPr>
@@ -7719,7 +7767,7 @@
             <a:r>
               <a:rPr lang="en-US" sz="1100" dirty="0">
                 <a:solidFill>
-                  <a:srgbClr val="7A8594"/>
+                  <a:srgbClr val="5B6982"/>
                 </a:solidFill>
                 <a:latin typeface="Calibri" pitchFamily="34" charset="0"/>
                 <a:ea typeface="Calibri" pitchFamily="34" charset="-122"/>
@@ -7745,7 +7793,7 @@
     <p:bg>
       <p:bgPr>
         <a:solidFill>
-          <a:srgbClr val="FAFBFC"/>
+          <a:srgbClr val="F3F7FE"/>
         </a:solidFill>
       </p:bgPr>
     </p:bg>
@@ -7790,7 +7838,7 @@
             <a:r>
               <a:rPr lang="en-US" sz="2600" b="1" dirty="0">
                 <a:solidFill>
-                  <a:srgbClr val="18212C"/>
+                  <a:srgbClr val="05142E"/>
                 </a:solidFill>
                 <a:latin typeface="Arial" pitchFamily="34" charset="0"/>
                 <a:ea typeface="Arial" pitchFamily="34" charset="-122"/>
@@ -7823,7 +7871,7 @@
           </a:solidFill>
           <a:ln w="9525">
             <a:solidFill>
-              <a:srgbClr val="C9D0DA"/>
+              <a:srgbClr val="C9D6EC"/>
             </a:solidFill>
             <a:prstDash val="solid"/>
           </a:ln>
@@ -7873,7 +7921,7 @@
           </a:solidFill>
           <a:ln w="9525">
             <a:solidFill>
-              <a:srgbClr val="C9D0DA"/>
+              <a:srgbClr val="C9D6EC"/>
             </a:solidFill>
             <a:prstDash val="solid"/>
           </a:ln>
@@ -7929,7 +7977,7 @@
             <a:r>
               <a:rPr lang="en-US" sz="900" i="1" dirty="0">
                 <a:solidFill>
-                  <a:srgbClr val="7A8594"/>
+                  <a:srgbClr val="5B6982"/>
                 </a:solidFill>
                 <a:latin typeface="Calibri" pitchFamily="34" charset="0"/>
                 <a:ea typeface="Calibri" pitchFamily="34" charset="-122"/>
@@ -7972,7 +8020,7 @@
             <a:r>
               <a:rPr lang="en-US" sz="1050" dirty="0">
                 <a:solidFill>
-                  <a:srgbClr val="4A5563"/>
+                  <a:srgbClr val="3C485C"/>
                 </a:solidFill>
                 <a:latin typeface="Calibri" pitchFamily="34" charset="0"/>
                 <a:ea typeface="Calibri" pitchFamily="34" charset="-122"/>
@@ -7993,7 +8041,7 @@
             <a:r>
               <a:rPr lang="en-US" sz="1050" dirty="0">
                 <a:solidFill>
-                  <a:srgbClr val="4A5563"/>
+                  <a:srgbClr val="3C485C"/>
                 </a:solidFill>
                 <a:latin typeface="Calibri" pitchFamily="34" charset="0"/>
                 <a:ea typeface="Calibri" pitchFamily="34" charset="-122"/>
@@ -8014,7 +8062,7 @@
             <a:r>
               <a:rPr lang="en-US" sz="1050" dirty="0">
                 <a:solidFill>
-                  <a:srgbClr val="4A5563"/>
+                  <a:srgbClr val="3C485C"/>
                 </a:solidFill>
                 <a:latin typeface="Calibri" pitchFamily="34" charset="0"/>
                 <a:ea typeface="Calibri" pitchFamily="34" charset="-122"/>
@@ -8035,7 +8083,7 @@
             <a:r>
               <a:rPr lang="en-US" sz="1050" dirty="0">
                 <a:solidFill>
-                  <a:srgbClr val="4A5563"/>
+                  <a:srgbClr val="3C485C"/>
                 </a:solidFill>
                 <a:latin typeface="Calibri" pitchFamily="34" charset="0"/>
                 <a:ea typeface="Calibri" pitchFamily="34" charset="-122"/>
@@ -8064,7 +8112,7 @@
           <a:noFill/>
           <a:ln w="15875">
             <a:solidFill>
-              <a:srgbClr val="1F4FA8"/>
+              <a:srgbClr val="155DD3"/>
             </a:solidFill>
             <a:prstDash val="solid"/>
             <a:headEnd type="triangle"/>
@@ -8089,7 +8137,7 @@
           <a:noFill/>
           <a:ln w="12700">
             <a:solidFill>
-              <a:srgbClr val="1F4FA8"/>
+              <a:srgbClr val="155DD3"/>
             </a:solidFill>
             <a:prstDash val="solid"/>
           </a:ln>
@@ -8112,7 +8160,7 @@
           <a:noFill/>
           <a:ln w="12700">
             <a:solidFill>
-              <a:srgbClr val="1F4FA8"/>
+              <a:srgbClr val="155DD3"/>
             </a:solidFill>
             <a:prstDash val="solid"/>
           </a:ln>
@@ -8133,7 +8181,7 @@
             <a:avLst/>
           </a:prstGeom>
           <a:solidFill>
-            <a:srgbClr val="FAFBFC"/>
+            <a:srgbClr val="F3F7FE"/>
           </a:solidFill>
           <a:ln/>
         </p:spPr>
@@ -8147,7 +8195,7 @@
             <a:r>
               <a:rPr lang="en-US" sz="1500" b="1" dirty="0">
                 <a:solidFill>
-                  <a:srgbClr val="1F4FA8"/>
+                  <a:srgbClr val="155DD3"/>
                 </a:solidFill>
                 <a:latin typeface="Courier New" pitchFamily="34" charset="0"/>
                 <a:ea typeface="Courier New" pitchFamily="34" charset="-122"/>
@@ -8186,7 +8234,7 @@
             <a:r>
               <a:rPr lang="en-US" sz="1100" dirty="0">
                 <a:solidFill>
-                  <a:srgbClr val="7A8594"/>
+                  <a:srgbClr val="5B6982"/>
                 </a:solidFill>
                 <a:latin typeface="Calibri" pitchFamily="34" charset="0"/>
                 <a:ea typeface="Calibri" pitchFamily="34" charset="-122"/>
@@ -8215,7 +8263,7 @@
           <a:noFill/>
           <a:ln w="15875">
             <a:solidFill>
-              <a:srgbClr val="1F4FA8"/>
+              <a:srgbClr val="155DD3"/>
             </a:solidFill>
             <a:prstDash val="solid"/>
             <a:headEnd type="triangle"/>
@@ -8240,7 +8288,7 @@
           <a:noFill/>
           <a:ln w="12700">
             <a:solidFill>
-              <a:srgbClr val="1F4FA8"/>
+              <a:srgbClr val="155DD3"/>
             </a:solidFill>
             <a:prstDash val="solid"/>
           </a:ln>
@@ -8263,7 +8311,7 @@
           <a:noFill/>
           <a:ln w="12700">
             <a:solidFill>
-              <a:srgbClr val="1F4FA8"/>
+              <a:srgbClr val="155DD3"/>
             </a:solidFill>
             <a:prstDash val="solid"/>
           </a:ln>
@@ -8284,7 +8332,7 @@
             <a:avLst/>
           </a:prstGeom>
           <a:solidFill>
-            <a:srgbClr val="FAFBFC"/>
+            <a:srgbClr val="F3F7FE"/>
           </a:solidFill>
           <a:ln/>
         </p:spPr>
@@ -8298,7 +8346,7 @@
             <a:r>
               <a:rPr lang="en-US" sz="1500" b="1" dirty="0">
                 <a:solidFill>
-                  <a:srgbClr val="1F4FA8"/>
+                  <a:srgbClr val="155DD3"/>
                 </a:solidFill>
                 <a:latin typeface="Courier New" pitchFamily="34" charset="0"/>
                 <a:ea typeface="Courier New" pitchFamily="34" charset="-122"/>
@@ -8337,7 +8385,7 @@
             <a:r>
               <a:rPr lang="en-US" sz="1100" dirty="0">
                 <a:solidFill>
-                  <a:srgbClr val="7A8594"/>
+                  <a:srgbClr val="5B6982"/>
                 </a:solidFill>
                 <a:latin typeface="Calibri" pitchFamily="34" charset="0"/>
                 <a:ea typeface="Calibri" pitchFamily="34" charset="-122"/>
@@ -8366,7 +8414,7 @@
           <a:noFill/>
           <a:ln w="15875">
             <a:solidFill>
-              <a:srgbClr val="1F4FA8"/>
+              <a:srgbClr val="155DD3"/>
             </a:solidFill>
             <a:prstDash val="solid"/>
             <a:headEnd type="triangle"/>
@@ -8391,7 +8439,7 @@
           <a:noFill/>
           <a:ln w="12700">
             <a:solidFill>
-              <a:srgbClr val="1F4FA8"/>
+              <a:srgbClr val="155DD3"/>
             </a:solidFill>
             <a:prstDash val="solid"/>
           </a:ln>
@@ -8414,7 +8462,7 @@
           <a:noFill/>
           <a:ln w="12700">
             <a:solidFill>
-              <a:srgbClr val="1F4FA8"/>
+              <a:srgbClr val="155DD3"/>
             </a:solidFill>
             <a:prstDash val="solid"/>
           </a:ln>
@@ -8435,7 +8483,7 @@
             <a:avLst/>
           </a:prstGeom>
           <a:solidFill>
-            <a:srgbClr val="FAFBFC"/>
+            <a:srgbClr val="F3F7FE"/>
           </a:solidFill>
           <a:ln/>
         </p:spPr>
@@ -8449,7 +8497,7 @@
             <a:r>
               <a:rPr lang="en-US" sz="1500" b="1" dirty="0">
                 <a:solidFill>
-                  <a:srgbClr val="1F4FA8"/>
+                  <a:srgbClr val="155DD3"/>
                 </a:solidFill>
                 <a:latin typeface="Courier New" pitchFamily="34" charset="0"/>
                 <a:ea typeface="Courier New" pitchFamily="34" charset="-122"/>
@@ -8488,7 +8536,7 @@
             <a:r>
               <a:rPr lang="en-US" sz="1100" dirty="0">
                 <a:solidFill>
-                  <a:srgbClr val="7A8594"/>
+                  <a:srgbClr val="5B6982"/>
                 </a:solidFill>
                 <a:latin typeface="Calibri" pitchFamily="34" charset="0"/>
                 <a:ea typeface="Calibri" pitchFamily="34" charset="-122"/>
@@ -8527,7 +8575,7 @@
             <a:r>
               <a:rPr lang="en-US" sz="850" dirty="0">
                 <a:solidFill>
-                  <a:srgbClr val="7A8594"/>
+                  <a:srgbClr val="5B6982"/>
                 </a:solidFill>
                 <a:latin typeface="Courier New" pitchFamily="34" charset="0"/>
                 <a:ea typeface="Courier New" pitchFamily="34" charset="-122"/>
@@ -8553,7 +8601,7 @@
     <p:bg>
       <p:bgPr>
         <a:solidFill>
-          <a:srgbClr val="0E1A2B"/>
+          <a:srgbClr val="05142E"/>
         </a:solidFill>
       </p:bgPr>
     </p:bg>
@@ -8598,7 +8646,7 @@
             <a:r>
               <a:rPr lang="en-US" sz="3000" b="1" dirty="0">
                 <a:solidFill>
-                  <a:srgbClr val="E4ECF6"/>
+                  <a:srgbClr val="F3F7FE"/>
                 </a:solidFill>
                 <a:latin typeface="Arial" pitchFamily="34" charset="0"/>
                 <a:ea typeface="Arial" pitchFamily="34" charset="-122"/>
@@ -8627,7 +8675,7 @@
             </a:avLst>
           </a:prstGeom>
           <a:solidFill>
-            <a:srgbClr val="132238"/>
+            <a:srgbClr val="0B2049"/>
           </a:solidFill>
           <a:ln w="9525">
             <a:solidFill>
@@ -8687,7 +8735,7 @@
             <a:r>
               <a:rPr lang="en-US" sz="900" i="1" dirty="0">
                 <a:solidFill>
-                  <a:srgbClr val="AFBCCB"/>
+                  <a:srgbClr val="BED4F9"/>
                 </a:solidFill>
                 <a:latin typeface="Calibri" pitchFamily="34" charset="0"/>
                 <a:ea typeface="Calibri" pitchFamily="34" charset="-122"/>
@@ -8730,7 +8778,7 @@
             <a:r>
               <a:rPr lang="en-US" sz="1100" dirty="0">
                 <a:solidFill>
-                  <a:srgbClr val="E4ECF6"/>
+                  <a:srgbClr val="F3F7FE"/>
                 </a:solidFill>
                 <a:latin typeface="Calibri" pitchFamily="34" charset="0"/>
                 <a:ea typeface="Calibri" pitchFamily="34" charset="-122"/>
@@ -8751,7 +8799,7 @@
             <a:r>
               <a:rPr lang="en-US" sz="1100" dirty="0">
                 <a:solidFill>
-                  <a:srgbClr val="E4ECF6"/>
+                  <a:srgbClr val="F3F7FE"/>
                 </a:solidFill>
                 <a:latin typeface="Calibri" pitchFamily="34" charset="0"/>
                 <a:ea typeface="Calibri" pitchFamily="34" charset="-122"/>
@@ -8772,7 +8820,7 @@
             <a:r>
               <a:rPr lang="en-US" sz="1100" dirty="0">
                 <a:solidFill>
-                  <a:srgbClr val="E4ECF6"/>
+                  <a:srgbClr val="F3F7FE"/>
                 </a:solidFill>
                 <a:latin typeface="Calibri" pitchFamily="34" charset="0"/>
                 <a:ea typeface="Calibri" pitchFamily="34" charset="-122"/>
@@ -8793,7 +8841,7 @@
             <a:r>
               <a:rPr lang="en-US" sz="1100" dirty="0">
                 <a:solidFill>
-                  <a:srgbClr val="E4ECF6"/>
+                  <a:srgbClr val="F3F7FE"/>
                 </a:solidFill>
                 <a:latin typeface="Calibri" pitchFamily="34" charset="0"/>
                 <a:ea typeface="Calibri" pitchFamily="34" charset="-122"/>
@@ -8822,7 +8870,7 @@
           <a:noFill/>
           <a:ln w="15875">
             <a:solidFill>
-              <a:srgbClr val="8FB8FF"/>
+              <a:srgbClr val="6C9EF0"/>
             </a:solidFill>
             <a:prstDash val="solid"/>
             <a:headEnd type="triangle"/>
@@ -8847,7 +8895,7 @@
           <a:noFill/>
           <a:ln w="12700">
             <a:solidFill>
-              <a:srgbClr val="8FB8FF"/>
+              <a:srgbClr val="6C9EF0"/>
             </a:solidFill>
             <a:prstDash val="solid"/>
           </a:ln>
@@ -8870,7 +8918,7 @@
           <a:noFill/>
           <a:ln w="12700">
             <a:solidFill>
-              <a:srgbClr val="8FB8FF"/>
+              <a:srgbClr val="6C9EF0"/>
             </a:solidFill>
             <a:prstDash val="solid"/>
           </a:ln>
@@ -8891,7 +8939,7 @@
             <a:avLst/>
           </a:prstGeom>
           <a:solidFill>
-            <a:srgbClr val="0E1A2B"/>
+            <a:srgbClr val="05142E"/>
           </a:solidFill>
           <a:ln/>
         </p:spPr>
@@ -8905,7 +8953,7 @@
             <a:r>
               <a:rPr lang="en-US" sz="1400" b="1" dirty="0">
                 <a:solidFill>
-                  <a:srgbClr val="8FB8FF"/>
+                  <a:srgbClr val="6C9EF0"/>
                 </a:solidFill>
                 <a:latin typeface="Courier New" pitchFamily="34" charset="0"/>
                 <a:ea typeface="Courier New" pitchFamily="34" charset="-122"/>
@@ -8944,7 +8992,7 @@
             <a:r>
               <a:rPr lang="en-US" sz="1100" dirty="0">
                 <a:solidFill>
-                  <a:srgbClr val="AFBCCB"/>
+                  <a:srgbClr val="BED4F9"/>
                 </a:solidFill>
                 <a:latin typeface="Calibri" pitchFamily="34" charset="0"/>
                 <a:ea typeface="Calibri" pitchFamily="34" charset="-122"/>
@@ -8973,7 +9021,7 @@
           <a:noFill/>
           <a:ln w="15875">
             <a:solidFill>
-              <a:srgbClr val="8FB8FF"/>
+              <a:srgbClr val="6C9EF0"/>
             </a:solidFill>
             <a:prstDash val="solid"/>
             <a:headEnd type="triangle"/>
@@ -8998,7 +9046,7 @@
           <a:noFill/>
           <a:ln w="12700">
             <a:solidFill>
-              <a:srgbClr val="8FB8FF"/>
+              <a:srgbClr val="6C9EF0"/>
             </a:solidFill>
             <a:prstDash val="solid"/>
           </a:ln>
@@ -9021,7 +9069,7 @@
           <a:noFill/>
           <a:ln w="12700">
             <a:solidFill>
-              <a:srgbClr val="8FB8FF"/>
+              <a:srgbClr val="6C9EF0"/>
             </a:solidFill>
             <a:prstDash val="solid"/>
           </a:ln>
@@ -9042,7 +9090,7 @@
             <a:avLst/>
           </a:prstGeom>
           <a:solidFill>
-            <a:srgbClr val="0E1A2B"/>
+            <a:srgbClr val="05142E"/>
           </a:solidFill>
           <a:ln/>
         </p:spPr>
@@ -9056,7 +9104,7 @@
             <a:r>
               <a:rPr lang="en-US" sz="1400" b="1" dirty="0">
                 <a:solidFill>
-                  <a:srgbClr val="8FB8FF"/>
+                  <a:srgbClr val="6C9EF0"/>
                 </a:solidFill>
                 <a:latin typeface="Courier New" pitchFamily="34" charset="0"/>
                 <a:ea typeface="Courier New" pitchFamily="34" charset="-122"/>
@@ -9095,7 +9143,7 @@
             <a:r>
               <a:rPr lang="en-US" sz="1100" dirty="0">
                 <a:solidFill>
-                  <a:srgbClr val="AFBCCB"/>
+                  <a:srgbClr val="BED4F9"/>
                 </a:solidFill>
                 <a:latin typeface="Calibri" pitchFamily="34" charset="0"/>
                 <a:ea typeface="Calibri" pitchFamily="34" charset="-122"/>
@@ -9124,7 +9172,7 @@
           <a:noFill/>
           <a:ln w="15875">
             <a:solidFill>
-              <a:srgbClr val="8FB8FF"/>
+              <a:srgbClr val="6C9EF0"/>
             </a:solidFill>
             <a:prstDash val="solid"/>
             <a:headEnd type="triangle"/>
@@ -9149,7 +9197,7 @@
           <a:noFill/>
           <a:ln w="12700">
             <a:solidFill>
-              <a:srgbClr val="8FB8FF"/>
+              <a:srgbClr val="6C9EF0"/>
             </a:solidFill>
             <a:prstDash val="solid"/>
           </a:ln>
@@ -9172,7 +9220,7 @@
           <a:noFill/>
           <a:ln w="12700">
             <a:solidFill>
-              <a:srgbClr val="8FB8FF"/>
+              <a:srgbClr val="6C9EF0"/>
             </a:solidFill>
             <a:prstDash val="solid"/>
           </a:ln>
@@ -9193,7 +9241,7 @@
             <a:avLst/>
           </a:prstGeom>
           <a:solidFill>
-            <a:srgbClr val="0E1A2B"/>
+            <a:srgbClr val="05142E"/>
           </a:solidFill>
           <a:ln/>
         </p:spPr>
@@ -9207,7 +9255,7 @@
             <a:r>
               <a:rPr lang="en-US" sz="1400" b="1" dirty="0">
                 <a:solidFill>
-                  <a:srgbClr val="8FB8FF"/>
+                  <a:srgbClr val="6C9EF0"/>
                 </a:solidFill>
                 <a:latin typeface="Courier New" pitchFamily="34" charset="0"/>
                 <a:ea typeface="Courier New" pitchFamily="34" charset="-122"/>
@@ -9246,7 +9294,7 @@
             <a:r>
               <a:rPr lang="en-US" sz="1100" dirty="0">
                 <a:solidFill>
-                  <a:srgbClr val="AFBCCB"/>
+                  <a:srgbClr val="BED4F9"/>
                 </a:solidFill>
                 <a:latin typeface="Calibri" pitchFamily="34" charset="0"/>
                 <a:ea typeface="Calibri" pitchFamily="34" charset="-122"/>
@@ -9272,7 +9320,7 @@
     <p:bg>
       <p:bgPr>
         <a:solidFill>
-          <a:srgbClr val="FAFBFC"/>
+          <a:srgbClr val="F3F7FE"/>
         </a:solidFill>
       </p:bgPr>
     </p:bg>
@@ -9317,7 +9365,7 @@
             <a:r>
               <a:rPr lang="en-US" sz="2600" b="1" dirty="0">
                 <a:solidFill>
-                  <a:srgbClr val="18212C"/>
+                  <a:srgbClr val="05142E"/>
                 </a:solidFill>
                 <a:latin typeface="Arial" pitchFamily="34" charset="0"/>
                 <a:ea typeface="Arial" pitchFamily="34" charset="-122"/>
@@ -9346,11 +9394,11 @@
             </a:avLst>
           </a:prstGeom>
           <a:solidFill>
-            <a:srgbClr val="E4ECFA"/>
+            <a:srgbClr val="E2ECFC"/>
           </a:solidFill>
           <a:ln w="12700">
             <a:solidFill>
-              <a:srgbClr val="1F4FA8"/>
+              <a:srgbClr val="155DD3"/>
             </a:solidFill>
             <a:prstDash val="solid"/>
           </a:ln>
@@ -9383,7 +9431,7 @@
             <a:r>
               <a:rPr lang="en-US" sz="1200" b="1" dirty="0">
                 <a:solidFill>
-                  <a:srgbClr val="1F4FA8"/>
+                  <a:srgbClr val="155DD3"/>
                 </a:solidFill>
                 <a:latin typeface="Arial" pitchFamily="34" charset="0"/>
                 <a:ea typeface="Arial" pitchFamily="34" charset="-122"/>
@@ -9422,7 +9470,7 @@
             <a:r>
               <a:rPr lang="en-US" sz="950" dirty="0">
                 <a:solidFill>
-                  <a:srgbClr val="4A5563"/>
+                  <a:srgbClr val="3C485C"/>
                 </a:solidFill>
                 <a:latin typeface="Calibri" pitchFamily="34" charset="0"/>
                 <a:ea typeface="Calibri" pitchFamily="34" charset="-122"/>
@@ -9455,7 +9503,7 @@
           </a:solidFill>
           <a:ln w="12700">
             <a:solidFill>
-              <a:srgbClr val="C9D0DA"/>
+              <a:srgbClr val="C9D6EC"/>
             </a:solidFill>
             <a:prstDash val="solid"/>
           </a:ln>
@@ -9488,7 +9536,7 @@
             <a:r>
               <a:rPr lang="en-US" sz="1200" b="1" dirty="0">
                 <a:solidFill>
-                  <a:srgbClr val="18212C"/>
+                  <a:srgbClr val="05142E"/>
                 </a:solidFill>
                 <a:latin typeface="Arial" pitchFamily="34" charset="0"/>
                 <a:ea typeface="Arial" pitchFamily="34" charset="-122"/>
@@ -9527,7 +9575,7 @@
             <a:r>
               <a:rPr lang="en-US" sz="950" dirty="0">
                 <a:solidFill>
-                  <a:srgbClr val="4A5563"/>
+                  <a:srgbClr val="3C485C"/>
                 </a:solidFill>
                 <a:latin typeface="Calibri" pitchFamily="34" charset="0"/>
                 <a:ea typeface="Calibri" pitchFamily="34" charset="-122"/>
@@ -9632,7 +9680,7 @@
             <a:r>
               <a:rPr lang="en-US" sz="950" dirty="0">
                 <a:solidFill>
-                  <a:srgbClr val="4A5563"/>
+                  <a:srgbClr val="3C485C"/>
                 </a:solidFill>
                 <a:latin typeface="Calibri" pitchFamily="34" charset="0"/>
                 <a:ea typeface="Calibri" pitchFamily="34" charset="-122"/>
@@ -9661,7 +9709,7 @@
           <a:noFill/>
           <a:ln w="15875">
             <a:solidFill>
-              <a:srgbClr val="4A5563"/>
+              <a:srgbClr val="3C485C"/>
             </a:solidFill>
             <a:prstDash val="solid"/>
             <a:tailEnd type="triangle"/>
@@ -9695,7 +9743,7 @@
             <a:r>
               <a:rPr lang="en-US" sz="850" dirty="0">
                 <a:solidFill>
-                  <a:srgbClr val="7A8594"/>
+                  <a:srgbClr val="5B6982"/>
                 </a:solidFill>
                 <a:latin typeface="Courier New" pitchFamily="34" charset="0"/>
                 <a:ea typeface="Courier New" pitchFamily="34" charset="-122"/>
@@ -9724,7 +9772,7 @@
           <a:noFill/>
           <a:ln w="15875">
             <a:solidFill>
-              <a:srgbClr val="4A5563"/>
+              <a:srgbClr val="3C485C"/>
             </a:solidFill>
             <a:prstDash val="solid"/>
             <a:tailEnd type="triangle"/>
@@ -9758,7 +9806,7 @@
             <a:r>
               <a:rPr lang="en-US" sz="850" dirty="0">
                 <a:solidFill>
-                  <a:srgbClr val="7A8594"/>
+                  <a:srgbClr val="5B6982"/>
                 </a:solidFill>
                 <a:latin typeface="Courier New" pitchFamily="34" charset="0"/>
                 <a:ea typeface="Courier New" pitchFamily="34" charset="-122"/>
@@ -9787,7 +9835,7 @@
           <a:noFill/>
           <a:ln w="15875">
             <a:solidFill>
-              <a:srgbClr val="1F4FA8"/>
+              <a:srgbClr val="155DD3"/>
             </a:solidFill>
             <a:prstDash val="solid"/>
             <a:headEnd type="triangle"/>
@@ -9811,7 +9859,7 @@
           <a:noFill/>
           <a:ln w="15875">
             <a:solidFill>
-              <a:srgbClr val="1F4FA8"/>
+              <a:srgbClr val="155DD3"/>
             </a:solidFill>
             <a:prstDash val="solid"/>
           </a:ln>
@@ -9834,7 +9882,7 @@
           <a:noFill/>
           <a:ln w="15875">
             <a:solidFill>
-              <a:srgbClr val="1F4FA8"/>
+              <a:srgbClr val="155DD3"/>
             </a:solidFill>
             <a:prstDash val="solid"/>
           </a:ln>
@@ -9867,7 +9915,7 @@
             <a:r>
               <a:rPr lang="en-US" sz="850" dirty="0">
                 <a:solidFill>
-                  <a:srgbClr val="1F4FA8"/>
+                  <a:srgbClr val="155DD3"/>
                 </a:solidFill>
                 <a:latin typeface="Courier New" pitchFamily="34" charset="0"/>
                 <a:ea typeface="Courier New" pitchFamily="34" charset="-122"/>
@@ -9962,7 +10010,7 @@
           </a:solidFill>
           <a:ln w="9525">
             <a:solidFill>
-              <a:srgbClr val="C9D0DA"/>
+              <a:srgbClr val="C9D6EC"/>
             </a:solidFill>
             <a:prstDash val="solid"/>
           </a:ln>
@@ -9995,7 +10043,7 @@
             <a:r>
               <a:rPr lang="en-US" sz="900" dirty="0">
                 <a:solidFill>
-                  <a:srgbClr val="4A5563"/>
+                  <a:srgbClr val="3C485C"/>
                 </a:solidFill>
                 <a:latin typeface="Courier New" pitchFamily="34" charset="0"/>
                 <a:ea typeface="Courier New" pitchFamily="34" charset="-122"/>
@@ -10028,7 +10076,7 @@
           </a:solidFill>
           <a:ln w="9525">
             <a:solidFill>
-              <a:srgbClr val="C9D0DA"/>
+              <a:srgbClr val="C9D6EC"/>
             </a:solidFill>
             <a:prstDash val="solid"/>
           </a:ln>
@@ -10061,7 +10109,7 @@
             <a:r>
               <a:rPr lang="en-US" sz="900" dirty="0">
                 <a:solidFill>
-                  <a:srgbClr val="4A5563"/>
+                  <a:srgbClr val="3C485C"/>
                 </a:solidFill>
                 <a:latin typeface="Courier New" pitchFamily="34" charset="0"/>
                 <a:ea typeface="Courier New" pitchFamily="34" charset="-122"/>
@@ -10094,7 +10142,7 @@
           </a:solidFill>
           <a:ln w="9525">
             <a:solidFill>
-              <a:srgbClr val="C9D0DA"/>
+              <a:srgbClr val="C9D6EC"/>
             </a:solidFill>
             <a:prstDash val="solid"/>
           </a:ln>
@@ -10127,7 +10175,7 @@
             <a:r>
               <a:rPr lang="en-US" sz="900" dirty="0">
                 <a:solidFill>
-                  <a:srgbClr val="4A5563"/>
+                  <a:srgbClr val="3C485C"/>
                 </a:solidFill>
                 <a:latin typeface="Courier New" pitchFamily="34" charset="0"/>
                 <a:ea typeface="Courier New" pitchFamily="34" charset="-122"/>
@@ -10160,7 +10208,7 @@
           </a:solidFill>
           <a:ln w="9525">
             <a:solidFill>
-              <a:srgbClr val="C9D0DA"/>
+              <a:srgbClr val="C9D6EC"/>
             </a:solidFill>
             <a:prstDash val="solid"/>
           </a:ln>
@@ -10193,7 +10241,7 @@
             <a:r>
               <a:rPr lang="en-US" sz="900" dirty="0">
                 <a:solidFill>
-                  <a:srgbClr val="4A5563"/>
+                  <a:srgbClr val="3C485C"/>
                 </a:solidFill>
                 <a:latin typeface="Courier New" pitchFamily="34" charset="0"/>
                 <a:ea typeface="Courier New" pitchFamily="34" charset="-122"/>
@@ -10226,7 +10274,7 @@
           </a:solidFill>
           <a:ln w="9525">
             <a:solidFill>
-              <a:srgbClr val="C9D0DA"/>
+              <a:srgbClr val="C9D6EC"/>
             </a:solidFill>
             <a:prstDash val="solid"/>
           </a:ln>
@@ -10259,7 +10307,7 @@
             <a:r>
               <a:rPr lang="en-US" sz="900" dirty="0">
                 <a:solidFill>
-                  <a:srgbClr val="4A5563"/>
+                  <a:srgbClr val="3C485C"/>
                 </a:solidFill>
                 <a:latin typeface="Courier New" pitchFamily="34" charset="0"/>
                 <a:ea typeface="Courier New" pitchFamily="34" charset="-122"/>
@@ -10292,7 +10340,7 @@
           </a:solidFill>
           <a:ln w="9525">
             <a:solidFill>
-              <a:srgbClr val="C9D0DA"/>
+              <a:srgbClr val="C9D6EC"/>
             </a:solidFill>
             <a:prstDash val="solid"/>
           </a:ln>
@@ -10325,7 +10373,7 @@
             <a:r>
               <a:rPr lang="en-US" sz="900" dirty="0">
                 <a:solidFill>
-                  <a:srgbClr val="4A5563"/>
+                  <a:srgbClr val="3C485C"/>
                 </a:solidFill>
                 <a:latin typeface="Courier New" pitchFamily="34" charset="0"/>
                 <a:ea typeface="Courier New" pitchFamily="34" charset="-122"/>
@@ -10358,7 +10406,7 @@
           </a:solidFill>
           <a:ln w="9525">
             <a:solidFill>
-              <a:srgbClr val="C9D0DA"/>
+              <a:srgbClr val="C9D6EC"/>
             </a:solidFill>
             <a:prstDash val="solid"/>
           </a:ln>
@@ -10391,7 +10439,7 @@
             <a:r>
               <a:rPr lang="en-US" sz="900" dirty="0">
                 <a:solidFill>
-                  <a:srgbClr val="4A5563"/>
+                  <a:srgbClr val="3C485C"/>
                 </a:solidFill>
                 <a:latin typeface="Courier New" pitchFamily="34" charset="0"/>
                 <a:ea typeface="Courier New" pitchFamily="34" charset="-122"/>
@@ -10430,7 +10478,7 @@
             <a:r>
               <a:rPr lang="en-US" sz="850" dirty="0">
                 <a:solidFill>
-                  <a:srgbClr val="7A8594"/>
+                  <a:srgbClr val="5B6982"/>
                 </a:solidFill>
                 <a:latin typeface="Courier New" pitchFamily="34" charset="0"/>
                 <a:ea typeface="Courier New" pitchFamily="34" charset="-122"/>
@@ -10456,7 +10504,7 @@
     <p:bg>
       <p:bgPr>
         <a:solidFill>
-          <a:srgbClr val="FAFBFC"/>
+          <a:srgbClr val="F3F7FE"/>
         </a:solidFill>
       </p:bgPr>
     </p:bg>
@@ -10501,7 +10549,7 @@
             <a:r>
               <a:rPr lang="en-US" sz="3000" b="1" dirty="0">
                 <a:solidFill>
-                  <a:srgbClr val="18212C"/>
+                  <a:srgbClr val="05142E"/>
                 </a:solidFill>
                 <a:latin typeface="Arial" pitchFamily="34" charset="0"/>
                 <a:ea typeface="Arial" pitchFamily="34" charset="-122"/>
@@ -10554,7 +10602,7 @@
                       <a:r>
                         <a:rPr lang="en-US" sz="900" b="1" dirty="0">
                           <a:solidFill>
-                            <a:srgbClr val="18212C"/>
+                            <a:srgbClr val="05142E"/>
                           </a:solidFill>
                           <a:latin typeface="Calibri" pitchFamily="34" charset="0"/>
                           <a:ea typeface="Calibri" pitchFamily="34" charset="-122"/>
@@ -10572,7 +10620,7 @@
                   <a:tcPr marL="91440" marR="91440" marT="45720" marB="45720" anchor="ctr">
                     <a:lnL w="6350" cap="flat" cmpd="sng" algn="ctr">
                       <a:solidFill>
-                        <a:srgbClr val="E1E6EC"/>
+                        <a:srgbClr val="E1E9F5"/>
                       </a:solidFill>
                       <a:prstDash val="solid"/>
                       <a:round/>
@@ -10581,7 +10629,7 @@
                     </a:lnL>
                     <a:lnR w="6350" cap="flat" cmpd="sng" algn="ctr">
                       <a:solidFill>
-                        <a:srgbClr val="E1E6EC"/>
+                        <a:srgbClr val="E1E9F5"/>
                       </a:solidFill>
                       <a:prstDash val="solid"/>
                       <a:round/>
@@ -10590,7 +10638,7 @@
                     </a:lnR>
                     <a:lnT w="6350" cap="flat" cmpd="sng" algn="ctr">
                       <a:solidFill>
-                        <a:srgbClr val="E1E6EC"/>
+                        <a:srgbClr val="E1E9F5"/>
                       </a:solidFill>
                       <a:prstDash val="solid"/>
                       <a:round/>
@@ -10599,7 +10647,7 @@
                     </a:lnT>
                     <a:lnB w="6350" cap="flat" cmpd="sng" algn="ctr">
                       <a:solidFill>
-                        <a:srgbClr val="E1E6EC"/>
+                        <a:srgbClr val="E1E9F5"/>
                       </a:solidFill>
                       <a:prstDash val="solid"/>
                       <a:round/>
@@ -10607,7 +10655,7 @@
                       <a:tailEnd type="none" w="med" len="med"/>
                     </a:lnB>
                     <a:solidFill>
-                      <a:srgbClr val="E1E6EC"/>
+                      <a:srgbClr val="E1E9F5"/>
                     </a:solidFill>
                   </a:tcPr>
                 </a:tc>
@@ -10622,7 +10670,7 @@
                       <a:r>
                         <a:rPr lang="en-US" sz="900" b="1" dirty="0">
                           <a:solidFill>
-                            <a:srgbClr val="18212C"/>
+                            <a:srgbClr val="05142E"/>
                           </a:solidFill>
                           <a:latin typeface="Calibri" pitchFamily="34" charset="0"/>
                           <a:ea typeface="Calibri" pitchFamily="34" charset="-122"/>
@@ -10640,7 +10688,7 @@
                   <a:tcPr marL="91440" marR="91440" marT="45720" marB="45720" anchor="ctr">
                     <a:lnL w="6350" cap="flat" cmpd="sng" algn="ctr">
                       <a:solidFill>
-                        <a:srgbClr val="E1E6EC"/>
+                        <a:srgbClr val="E1E9F5"/>
                       </a:solidFill>
                       <a:prstDash val="solid"/>
                       <a:round/>
@@ -10649,7 +10697,7 @@
                     </a:lnL>
                     <a:lnR w="6350" cap="flat" cmpd="sng" algn="ctr">
                       <a:solidFill>
-                        <a:srgbClr val="E1E6EC"/>
+                        <a:srgbClr val="E1E9F5"/>
                       </a:solidFill>
                       <a:prstDash val="solid"/>
                       <a:round/>
@@ -10658,7 +10706,7 @@
                     </a:lnR>
                     <a:lnT w="6350" cap="flat" cmpd="sng" algn="ctr">
                       <a:solidFill>
-                        <a:srgbClr val="E1E6EC"/>
+                        <a:srgbClr val="E1E9F5"/>
                       </a:solidFill>
                       <a:prstDash val="solid"/>
                       <a:round/>
@@ -10667,7 +10715,7 @@
                     </a:lnT>
                     <a:lnB w="6350" cap="flat" cmpd="sng" algn="ctr">
                       <a:solidFill>
-                        <a:srgbClr val="E1E6EC"/>
+                        <a:srgbClr val="E1E9F5"/>
                       </a:solidFill>
                       <a:prstDash val="solid"/>
                       <a:round/>
@@ -10675,7 +10723,7 @@
                       <a:tailEnd type="none" w="med" len="med"/>
                     </a:lnB>
                     <a:solidFill>
-                      <a:srgbClr val="E1E6EC"/>
+                      <a:srgbClr val="E1E9F5"/>
                     </a:solidFill>
                   </a:tcPr>
                 </a:tc>
@@ -10690,7 +10738,7 @@
                       <a:r>
                         <a:rPr lang="en-US" sz="900" b="1" dirty="0">
                           <a:solidFill>
-                            <a:srgbClr val="18212C"/>
+                            <a:srgbClr val="05142E"/>
                           </a:solidFill>
                           <a:latin typeface="Calibri" pitchFamily="34" charset="0"/>
                           <a:ea typeface="Calibri" pitchFamily="34" charset="-122"/>
@@ -10708,7 +10756,7 @@
                   <a:tcPr marL="91440" marR="91440" marT="45720" marB="45720" anchor="ctr">
                     <a:lnL w="6350" cap="flat" cmpd="sng" algn="ctr">
                       <a:solidFill>
-                        <a:srgbClr val="E1E6EC"/>
+                        <a:srgbClr val="E1E9F5"/>
                       </a:solidFill>
                       <a:prstDash val="solid"/>
                       <a:round/>
@@ -10717,7 +10765,7 @@
                     </a:lnL>
                     <a:lnR w="6350" cap="flat" cmpd="sng" algn="ctr">
                       <a:solidFill>
-                        <a:srgbClr val="E1E6EC"/>
+                        <a:srgbClr val="E1E9F5"/>
                       </a:solidFill>
                       <a:prstDash val="solid"/>
                       <a:round/>
@@ -10726,7 +10774,7 @@
                     </a:lnR>
                     <a:lnT w="6350" cap="flat" cmpd="sng" algn="ctr">
                       <a:solidFill>
-                        <a:srgbClr val="E1E6EC"/>
+                        <a:srgbClr val="E1E9F5"/>
                       </a:solidFill>
                       <a:prstDash val="solid"/>
                       <a:round/>
@@ -10735,7 +10783,7 @@
                     </a:lnT>
                     <a:lnB w="6350" cap="flat" cmpd="sng" algn="ctr">
                       <a:solidFill>
-                        <a:srgbClr val="E1E6EC"/>
+                        <a:srgbClr val="E1E9F5"/>
                       </a:solidFill>
                       <a:prstDash val="solid"/>
                       <a:round/>
@@ -10743,7 +10791,7 @@
                       <a:tailEnd type="none" w="med" len="med"/>
                     </a:lnB>
                     <a:solidFill>
-                      <a:srgbClr val="E1E6EC"/>
+                      <a:srgbClr val="E1E9F5"/>
                     </a:solidFill>
                   </a:tcPr>
                 </a:tc>
@@ -10758,7 +10806,7 @@
                       <a:r>
                         <a:rPr lang="en-US" sz="900" b="1" dirty="0">
                           <a:solidFill>
-                            <a:srgbClr val="18212C"/>
+                            <a:srgbClr val="05142E"/>
                           </a:solidFill>
                           <a:latin typeface="Calibri" pitchFamily="34" charset="0"/>
                           <a:ea typeface="Calibri" pitchFamily="34" charset="-122"/>
@@ -10776,7 +10824,7 @@
                   <a:tcPr marL="91440" marR="91440" marT="45720" marB="45720" anchor="ctr">
                     <a:lnL w="6350" cap="flat" cmpd="sng" algn="ctr">
                       <a:solidFill>
-                        <a:srgbClr val="E1E6EC"/>
+                        <a:srgbClr val="E1E9F5"/>
                       </a:solidFill>
                       <a:prstDash val="solid"/>
                       <a:round/>
@@ -10785,7 +10833,7 @@
                     </a:lnL>
                     <a:lnR w="6350" cap="flat" cmpd="sng" algn="ctr">
                       <a:solidFill>
-                        <a:srgbClr val="E1E6EC"/>
+                        <a:srgbClr val="E1E9F5"/>
                       </a:solidFill>
                       <a:prstDash val="solid"/>
                       <a:round/>
@@ -10794,7 +10842,7 @@
                     </a:lnR>
                     <a:lnT w="6350" cap="flat" cmpd="sng" algn="ctr">
                       <a:solidFill>
-                        <a:srgbClr val="E1E6EC"/>
+                        <a:srgbClr val="E1E9F5"/>
                       </a:solidFill>
                       <a:prstDash val="solid"/>
                       <a:round/>
@@ -10803,7 +10851,7 @@
                     </a:lnT>
                     <a:lnB w="6350" cap="flat" cmpd="sng" algn="ctr">
                       <a:solidFill>
-                        <a:srgbClr val="E1E6EC"/>
+                        <a:srgbClr val="E1E9F5"/>
                       </a:solidFill>
                       <a:prstDash val="solid"/>
                       <a:round/>
@@ -10811,7 +10859,7 @@
                       <a:tailEnd type="none" w="med" len="med"/>
                     </a:lnB>
                     <a:solidFill>
-                      <a:srgbClr val="E1E6EC"/>
+                      <a:srgbClr val="E1E9F5"/>
                     </a:solidFill>
                   </a:tcPr>
                 </a:tc>
@@ -10826,7 +10874,7 @@
                       <a:r>
                         <a:rPr lang="en-US" sz="900" b="1" dirty="0">
                           <a:solidFill>
-                            <a:srgbClr val="18212C"/>
+                            <a:srgbClr val="05142E"/>
                           </a:solidFill>
                           <a:latin typeface="Calibri" pitchFamily="34" charset="0"/>
                           <a:ea typeface="Calibri" pitchFamily="34" charset="-122"/>
@@ -10844,7 +10892,7 @@
                   <a:tcPr marL="91440" marR="91440" marT="45720" marB="45720" anchor="ctr">
                     <a:lnL w="6350" cap="flat" cmpd="sng" algn="ctr">
                       <a:solidFill>
-                        <a:srgbClr val="E1E6EC"/>
+                        <a:srgbClr val="E1E9F5"/>
                       </a:solidFill>
                       <a:prstDash val="solid"/>
                       <a:round/>
@@ -10853,7 +10901,7 @@
                     </a:lnL>
                     <a:lnR w="6350" cap="flat" cmpd="sng" algn="ctr">
                       <a:solidFill>
-                        <a:srgbClr val="E1E6EC"/>
+                        <a:srgbClr val="E1E9F5"/>
                       </a:solidFill>
                       <a:prstDash val="solid"/>
                       <a:round/>
@@ -10862,7 +10910,7 @@
                     </a:lnR>
                     <a:lnT w="6350" cap="flat" cmpd="sng" algn="ctr">
                       <a:solidFill>
-                        <a:srgbClr val="E1E6EC"/>
+                        <a:srgbClr val="E1E9F5"/>
                       </a:solidFill>
                       <a:prstDash val="solid"/>
                       <a:round/>
@@ -10871,7 +10919,7 @@
                     </a:lnT>
                     <a:lnB w="6350" cap="flat" cmpd="sng" algn="ctr">
                       <a:solidFill>
-                        <a:srgbClr val="E1E6EC"/>
+                        <a:srgbClr val="E1E9F5"/>
                       </a:solidFill>
                       <a:prstDash val="solid"/>
                       <a:round/>
@@ -10879,7 +10927,7 @@
                       <a:tailEnd type="none" w="med" len="med"/>
                     </a:lnB>
                     <a:solidFill>
-                      <a:srgbClr val="E1E6EC"/>
+                      <a:srgbClr val="E1E9F5"/>
                     </a:solidFill>
                   </a:tcPr>
                 </a:tc>
@@ -10896,7 +10944,7 @@
                       <a:r>
                         <a:rPr lang="en-US" sz="900" dirty="0">
                           <a:solidFill>
-                            <a:srgbClr val="4A5563"/>
+                            <a:srgbClr val="3C485C"/>
                           </a:solidFill>
                           <a:latin typeface="Calibri" pitchFamily="34" charset="0"/>
                           <a:ea typeface="Calibri" pitchFamily="34" charset="-122"/>
@@ -10914,7 +10962,7 @@
                   <a:tcPr marL="91440" marR="91440" marT="45720" marB="45720" anchor="ctr">
                     <a:lnL w="6350" cap="flat" cmpd="sng" algn="ctr">
                       <a:solidFill>
-                        <a:srgbClr val="E1E6EC"/>
+                        <a:srgbClr val="E1E9F5"/>
                       </a:solidFill>
                       <a:prstDash val="solid"/>
                       <a:round/>
@@ -10923,7 +10971,7 @@
                     </a:lnL>
                     <a:lnR w="6350" cap="flat" cmpd="sng" algn="ctr">
                       <a:solidFill>
-                        <a:srgbClr val="E1E6EC"/>
+                        <a:srgbClr val="E1E9F5"/>
                       </a:solidFill>
                       <a:prstDash val="solid"/>
                       <a:round/>
@@ -10932,7 +10980,7 @@
                     </a:lnR>
                     <a:lnT w="6350" cap="flat" cmpd="sng" algn="ctr">
                       <a:solidFill>
-                        <a:srgbClr val="E1E6EC"/>
+                        <a:srgbClr val="E1E9F5"/>
                       </a:solidFill>
                       <a:prstDash val="solid"/>
                       <a:round/>
@@ -10941,7 +10989,7 @@
                     </a:lnT>
                     <a:lnB w="6350" cap="flat" cmpd="sng" algn="ctr">
                       <a:solidFill>
-                        <a:srgbClr val="E1E6EC"/>
+                        <a:srgbClr val="E1E9F5"/>
                       </a:solidFill>
                       <a:prstDash val="solid"/>
                       <a:round/>
@@ -10982,7 +11030,7 @@
                   <a:tcPr marL="91440" marR="91440" marT="45720" marB="45720" anchor="ctr">
                     <a:lnL w="6350" cap="flat" cmpd="sng" algn="ctr">
                       <a:solidFill>
-                        <a:srgbClr val="E1E6EC"/>
+                        <a:srgbClr val="E1E9F5"/>
                       </a:solidFill>
                       <a:prstDash val="solid"/>
                       <a:round/>
@@ -10991,7 +11039,7 @@
                     </a:lnL>
                     <a:lnR w="6350" cap="flat" cmpd="sng" algn="ctr">
                       <a:solidFill>
-                        <a:srgbClr val="E1E6EC"/>
+                        <a:srgbClr val="E1E9F5"/>
                       </a:solidFill>
                       <a:prstDash val="solid"/>
                       <a:round/>
@@ -11000,7 +11048,7 @@
                     </a:lnR>
                     <a:lnT w="6350" cap="flat" cmpd="sng" algn="ctr">
                       <a:solidFill>
-                        <a:srgbClr val="E1E6EC"/>
+                        <a:srgbClr val="E1E9F5"/>
                       </a:solidFill>
                       <a:prstDash val="solid"/>
                       <a:round/>
@@ -11009,7 +11057,7 @@
                     </a:lnT>
                     <a:lnB w="6350" cap="flat" cmpd="sng" algn="ctr">
                       <a:solidFill>
-                        <a:srgbClr val="E1E6EC"/>
+                        <a:srgbClr val="E1E9F5"/>
                       </a:solidFill>
                       <a:prstDash val="solid"/>
                       <a:round/>
@@ -11050,7 +11098,7 @@
                   <a:tcPr marL="91440" marR="91440" marT="45720" marB="45720" anchor="ctr">
                     <a:lnL w="6350" cap="flat" cmpd="sng" algn="ctr">
                       <a:solidFill>
-                        <a:srgbClr val="E1E6EC"/>
+                        <a:srgbClr val="E1E9F5"/>
                       </a:solidFill>
                       <a:prstDash val="solid"/>
                       <a:round/>
@@ -11059,7 +11107,7 @@
                     </a:lnL>
                     <a:lnR w="6350" cap="flat" cmpd="sng" algn="ctr">
                       <a:solidFill>
-                        <a:srgbClr val="E1E6EC"/>
+                        <a:srgbClr val="E1E9F5"/>
                       </a:solidFill>
                       <a:prstDash val="solid"/>
                       <a:round/>
@@ -11068,7 +11116,7 @@
                     </a:lnR>
                     <a:lnT w="6350" cap="flat" cmpd="sng" algn="ctr">
                       <a:solidFill>
-                        <a:srgbClr val="E1E6EC"/>
+                        <a:srgbClr val="E1E9F5"/>
                       </a:solidFill>
                       <a:prstDash val="solid"/>
                       <a:round/>
@@ -11077,7 +11125,7 @@
                     </a:lnT>
                     <a:lnB w="6350" cap="flat" cmpd="sng" algn="ctr">
                       <a:solidFill>
-                        <a:srgbClr val="E1E6EC"/>
+                        <a:srgbClr val="E1E9F5"/>
                       </a:solidFill>
                       <a:prstDash val="solid"/>
                       <a:round/>
@@ -11100,7 +11148,7 @@
                       <a:r>
                         <a:rPr lang="en-US" sz="900" dirty="0">
                           <a:solidFill>
-                            <a:srgbClr val="4A5563"/>
+                            <a:srgbClr val="3C485C"/>
                           </a:solidFill>
                           <a:latin typeface="Calibri" pitchFamily="34" charset="0"/>
                           <a:ea typeface="Calibri" pitchFamily="34" charset="-122"/>
@@ -11118,7 +11166,7 @@
                   <a:tcPr marL="91440" marR="91440" marT="45720" marB="45720" anchor="ctr">
                     <a:lnL w="6350" cap="flat" cmpd="sng" algn="ctr">
                       <a:solidFill>
-                        <a:srgbClr val="E1E6EC"/>
+                        <a:srgbClr val="E1E9F5"/>
                       </a:solidFill>
                       <a:prstDash val="solid"/>
                       <a:round/>
@@ -11127,7 +11175,7 @@
                     </a:lnL>
                     <a:lnR w="6350" cap="flat" cmpd="sng" algn="ctr">
                       <a:solidFill>
-                        <a:srgbClr val="E1E6EC"/>
+                        <a:srgbClr val="E1E9F5"/>
                       </a:solidFill>
                       <a:prstDash val="solid"/>
                       <a:round/>
@@ -11136,7 +11184,7 @@
                     </a:lnR>
                     <a:lnT w="6350" cap="flat" cmpd="sng" algn="ctr">
                       <a:solidFill>
-                        <a:srgbClr val="E1E6EC"/>
+                        <a:srgbClr val="E1E9F5"/>
                       </a:solidFill>
                       <a:prstDash val="solid"/>
                       <a:round/>
@@ -11145,7 +11193,7 @@
                     </a:lnT>
                     <a:lnB w="6350" cap="flat" cmpd="sng" algn="ctr">
                       <a:solidFill>
-                        <a:srgbClr val="E1E6EC"/>
+                        <a:srgbClr val="E1E9F5"/>
                       </a:solidFill>
                       <a:prstDash val="solid"/>
                       <a:round/>
@@ -11168,7 +11216,7 @@
                       <a:r>
                         <a:rPr lang="en-US" sz="900" dirty="0">
                           <a:solidFill>
-                            <a:srgbClr val="4A5563"/>
+                            <a:srgbClr val="3C485C"/>
                           </a:solidFill>
                           <a:latin typeface="Calibri" pitchFamily="34" charset="0"/>
                           <a:ea typeface="Calibri" pitchFamily="34" charset="-122"/>
@@ -11186,7 +11234,7 @@
                   <a:tcPr marL="91440" marR="91440" marT="45720" marB="45720" anchor="ctr">
                     <a:lnL w="6350" cap="flat" cmpd="sng" algn="ctr">
                       <a:solidFill>
-                        <a:srgbClr val="E1E6EC"/>
+                        <a:srgbClr val="E1E9F5"/>
                       </a:solidFill>
                       <a:prstDash val="solid"/>
                       <a:round/>
@@ -11195,7 +11243,7 @@
                     </a:lnL>
                     <a:lnR w="6350" cap="flat" cmpd="sng" algn="ctr">
                       <a:solidFill>
-                        <a:srgbClr val="E1E6EC"/>
+                        <a:srgbClr val="E1E9F5"/>
                       </a:solidFill>
                       <a:prstDash val="solid"/>
                       <a:round/>
@@ -11204,7 +11252,7 @@
                     </a:lnR>
                     <a:lnT w="6350" cap="flat" cmpd="sng" algn="ctr">
                       <a:solidFill>
-                        <a:srgbClr val="E1E6EC"/>
+                        <a:srgbClr val="E1E9F5"/>
                       </a:solidFill>
                       <a:prstDash val="solid"/>
                       <a:round/>
@@ -11213,7 +11261,7 @@
                     </a:lnT>
                     <a:lnB w="6350" cap="flat" cmpd="sng" algn="ctr">
                       <a:solidFill>
-                        <a:srgbClr val="E1E6EC"/>
+                        <a:srgbClr val="E1E9F5"/>
                       </a:solidFill>
                       <a:prstDash val="solid"/>
                       <a:round/>
@@ -11238,7 +11286,7 @@
                       <a:r>
                         <a:rPr lang="en-US" sz="900" dirty="0">
                           <a:solidFill>
-                            <a:srgbClr val="4A5563"/>
+                            <a:srgbClr val="3C485C"/>
                           </a:solidFill>
                           <a:latin typeface="Calibri" pitchFamily="34" charset="0"/>
                           <a:ea typeface="Calibri" pitchFamily="34" charset="-122"/>
@@ -11256,7 +11304,7 @@
                   <a:tcPr marL="91440" marR="91440" marT="45720" marB="45720" anchor="ctr">
                     <a:lnL w="6350" cap="flat" cmpd="sng" algn="ctr">
                       <a:solidFill>
-                        <a:srgbClr val="E1E6EC"/>
+                        <a:srgbClr val="E1E9F5"/>
                       </a:solidFill>
                       <a:prstDash val="solid"/>
                       <a:round/>
@@ -11265,7 +11313,7 @@
                     </a:lnL>
                     <a:lnR w="6350" cap="flat" cmpd="sng" algn="ctr">
                       <a:solidFill>
-                        <a:srgbClr val="E1E6EC"/>
+                        <a:srgbClr val="E1E9F5"/>
                       </a:solidFill>
                       <a:prstDash val="solid"/>
                       <a:round/>
@@ -11274,7 +11322,7 @@
                     </a:lnR>
                     <a:lnT w="6350" cap="flat" cmpd="sng" algn="ctr">
                       <a:solidFill>
-                        <a:srgbClr val="E1E6EC"/>
+                        <a:srgbClr val="E1E9F5"/>
                       </a:solidFill>
                       <a:prstDash val="solid"/>
                       <a:round/>
@@ -11283,7 +11331,7 @@
                     </a:lnT>
                     <a:lnB w="6350" cap="flat" cmpd="sng" algn="ctr">
                       <a:solidFill>
-                        <a:srgbClr val="E1E6EC"/>
+                        <a:srgbClr val="E1E9F5"/>
                       </a:solidFill>
                       <a:prstDash val="solid"/>
                       <a:round/>
@@ -11324,7 +11372,7 @@
                   <a:tcPr marL="91440" marR="91440" marT="45720" marB="45720" anchor="ctr">
                     <a:lnL w="6350" cap="flat" cmpd="sng" algn="ctr">
                       <a:solidFill>
-                        <a:srgbClr val="E1E6EC"/>
+                        <a:srgbClr val="E1E9F5"/>
                       </a:solidFill>
                       <a:prstDash val="solid"/>
                       <a:round/>
@@ -11333,7 +11381,7 @@
                     </a:lnL>
                     <a:lnR w="6350" cap="flat" cmpd="sng" algn="ctr">
                       <a:solidFill>
-                        <a:srgbClr val="E1E6EC"/>
+                        <a:srgbClr val="E1E9F5"/>
                       </a:solidFill>
                       <a:prstDash val="solid"/>
                       <a:round/>
@@ -11342,7 +11390,7 @@
                     </a:lnR>
                     <a:lnT w="6350" cap="flat" cmpd="sng" algn="ctr">
                       <a:solidFill>
-                        <a:srgbClr val="E1E6EC"/>
+                        <a:srgbClr val="E1E9F5"/>
                       </a:solidFill>
                       <a:prstDash val="solid"/>
                       <a:round/>
@@ -11351,7 +11399,7 @@
                     </a:lnT>
                     <a:lnB w="6350" cap="flat" cmpd="sng" algn="ctr">
                       <a:solidFill>
-                        <a:srgbClr val="E1E6EC"/>
+                        <a:srgbClr val="E1E9F5"/>
                       </a:solidFill>
                       <a:prstDash val="solid"/>
                       <a:round/>
@@ -11392,7 +11440,7 @@
                   <a:tcPr marL="91440" marR="91440" marT="45720" marB="45720" anchor="ctr">
                     <a:lnL w="6350" cap="flat" cmpd="sng" algn="ctr">
                       <a:solidFill>
-                        <a:srgbClr val="E1E6EC"/>
+                        <a:srgbClr val="E1E9F5"/>
                       </a:solidFill>
                       <a:prstDash val="solid"/>
                       <a:round/>
@@ -11401,7 +11449,7 @@
                     </a:lnL>
                     <a:lnR w="6350" cap="flat" cmpd="sng" algn="ctr">
                       <a:solidFill>
-                        <a:srgbClr val="E1E6EC"/>
+                        <a:srgbClr val="E1E9F5"/>
                       </a:solidFill>
                       <a:prstDash val="solid"/>
                       <a:round/>
@@ -11410,7 +11458,7 @@
                     </a:lnR>
                     <a:lnT w="6350" cap="flat" cmpd="sng" algn="ctr">
                       <a:solidFill>
-                        <a:srgbClr val="E1E6EC"/>
+                        <a:srgbClr val="E1E9F5"/>
                       </a:solidFill>
                       <a:prstDash val="solid"/>
                       <a:round/>
@@ -11419,7 +11467,7 @@
                     </a:lnT>
                     <a:lnB w="6350" cap="flat" cmpd="sng" algn="ctr">
                       <a:solidFill>
-                        <a:srgbClr val="E1E6EC"/>
+                        <a:srgbClr val="E1E9F5"/>
                       </a:solidFill>
                       <a:prstDash val="solid"/>
                       <a:round/>
@@ -11442,7 +11490,7 @@
                       <a:r>
                         <a:rPr lang="en-US" sz="900" dirty="0">
                           <a:solidFill>
-                            <a:srgbClr val="4A5563"/>
+                            <a:srgbClr val="3C485C"/>
                           </a:solidFill>
                           <a:latin typeface="Calibri" pitchFamily="34" charset="0"/>
                           <a:ea typeface="Calibri" pitchFamily="34" charset="-122"/>
@@ -11460,7 +11508,7 @@
                   <a:tcPr marL="91440" marR="91440" marT="45720" marB="45720" anchor="ctr">
                     <a:lnL w="6350" cap="flat" cmpd="sng" algn="ctr">
                       <a:solidFill>
-                        <a:srgbClr val="E1E6EC"/>
+                        <a:srgbClr val="E1E9F5"/>
                       </a:solidFill>
                       <a:prstDash val="solid"/>
                       <a:round/>
@@ -11469,7 +11517,7 @@
                     </a:lnL>
                     <a:lnR w="6350" cap="flat" cmpd="sng" algn="ctr">
                       <a:solidFill>
-                        <a:srgbClr val="E1E6EC"/>
+                        <a:srgbClr val="E1E9F5"/>
                       </a:solidFill>
                       <a:prstDash val="solid"/>
                       <a:round/>
@@ -11478,7 +11526,7 @@
                     </a:lnR>
                     <a:lnT w="6350" cap="flat" cmpd="sng" algn="ctr">
                       <a:solidFill>
-                        <a:srgbClr val="E1E6EC"/>
+                        <a:srgbClr val="E1E9F5"/>
                       </a:solidFill>
                       <a:prstDash val="solid"/>
                       <a:round/>
@@ -11487,7 +11535,7 @@
                     </a:lnT>
                     <a:lnB w="6350" cap="flat" cmpd="sng" algn="ctr">
                       <a:solidFill>
-                        <a:srgbClr val="E1E6EC"/>
+                        <a:srgbClr val="E1E9F5"/>
                       </a:solidFill>
                       <a:prstDash val="solid"/>
                       <a:round/>
@@ -11528,7 +11576,7 @@
                   <a:tcPr marL="91440" marR="91440" marT="45720" marB="45720" anchor="ctr">
                     <a:lnL w="6350" cap="flat" cmpd="sng" algn="ctr">
                       <a:solidFill>
-                        <a:srgbClr val="E1E6EC"/>
+                        <a:srgbClr val="E1E9F5"/>
                       </a:solidFill>
                       <a:prstDash val="solid"/>
                       <a:round/>
@@ -11537,7 +11585,7 @@
                     </a:lnL>
                     <a:lnR w="6350" cap="flat" cmpd="sng" algn="ctr">
                       <a:solidFill>
-                        <a:srgbClr val="E1E6EC"/>
+                        <a:srgbClr val="E1E9F5"/>
                       </a:solidFill>
                       <a:prstDash val="solid"/>
                       <a:round/>
@@ -11546,7 +11594,7 @@
                     </a:lnR>
                     <a:lnT w="6350" cap="flat" cmpd="sng" algn="ctr">
                       <a:solidFill>
-                        <a:srgbClr val="E1E6EC"/>
+                        <a:srgbClr val="E1E9F5"/>
                       </a:solidFill>
                       <a:prstDash val="solid"/>
                       <a:round/>
@@ -11555,7 +11603,7 @@
                     </a:lnT>
                     <a:lnB w="6350" cap="flat" cmpd="sng" algn="ctr">
                       <a:solidFill>
-                        <a:srgbClr val="E1E6EC"/>
+                        <a:srgbClr val="E1E9F5"/>
                       </a:solidFill>
                       <a:prstDash val="solid"/>
                       <a:round/>
@@ -11580,7 +11628,7 @@
                       <a:r>
                         <a:rPr lang="en-US" sz="900" dirty="0">
                           <a:solidFill>
-                            <a:srgbClr val="4A5563"/>
+                            <a:srgbClr val="3C485C"/>
                           </a:solidFill>
                           <a:latin typeface="Calibri" pitchFamily="34" charset="0"/>
                           <a:ea typeface="Calibri" pitchFamily="34" charset="-122"/>
@@ -11598,7 +11646,7 @@
                   <a:tcPr marL="91440" marR="91440" marT="45720" marB="45720" anchor="ctr">
                     <a:lnL w="6350" cap="flat" cmpd="sng" algn="ctr">
                       <a:solidFill>
-                        <a:srgbClr val="E1E6EC"/>
+                        <a:srgbClr val="E1E9F5"/>
                       </a:solidFill>
                       <a:prstDash val="solid"/>
                       <a:round/>
@@ -11607,7 +11655,7 @@
                     </a:lnL>
                     <a:lnR w="6350" cap="flat" cmpd="sng" algn="ctr">
                       <a:solidFill>
-                        <a:srgbClr val="E1E6EC"/>
+                        <a:srgbClr val="E1E9F5"/>
                       </a:solidFill>
                       <a:prstDash val="solid"/>
                       <a:round/>
@@ -11616,7 +11664,7 @@
                     </a:lnR>
                     <a:lnT w="6350" cap="flat" cmpd="sng" algn="ctr">
                       <a:solidFill>
-                        <a:srgbClr val="E1E6EC"/>
+                        <a:srgbClr val="E1E9F5"/>
                       </a:solidFill>
                       <a:prstDash val="solid"/>
                       <a:round/>
@@ -11625,7 +11673,7 @@
                     </a:lnT>
                     <a:lnB w="6350" cap="flat" cmpd="sng" algn="ctr">
                       <a:solidFill>
-                        <a:srgbClr val="E1E6EC"/>
+                        <a:srgbClr val="E1E9F5"/>
                       </a:solidFill>
                       <a:prstDash val="solid"/>
                       <a:round/>
@@ -11666,7 +11714,7 @@
                   <a:tcPr marL="91440" marR="91440" marT="45720" marB="45720" anchor="ctr">
                     <a:lnL w="6350" cap="flat" cmpd="sng" algn="ctr">
                       <a:solidFill>
-                        <a:srgbClr val="E1E6EC"/>
+                        <a:srgbClr val="E1E9F5"/>
                       </a:solidFill>
                       <a:prstDash val="solid"/>
                       <a:round/>
@@ -11675,7 +11723,7 @@
                     </a:lnL>
                     <a:lnR w="6350" cap="flat" cmpd="sng" algn="ctr">
                       <a:solidFill>
-                        <a:srgbClr val="E1E6EC"/>
+                        <a:srgbClr val="E1E9F5"/>
                       </a:solidFill>
                       <a:prstDash val="solid"/>
                       <a:round/>
@@ -11684,7 +11732,7 @@
                     </a:lnR>
                     <a:lnT w="6350" cap="flat" cmpd="sng" algn="ctr">
                       <a:solidFill>
-                        <a:srgbClr val="E1E6EC"/>
+                        <a:srgbClr val="E1E9F5"/>
                       </a:solidFill>
                       <a:prstDash val="solid"/>
                       <a:round/>
@@ -11693,7 +11741,7 @@
                     </a:lnT>
                     <a:lnB w="6350" cap="flat" cmpd="sng" algn="ctr">
                       <a:solidFill>
-                        <a:srgbClr val="E1E6EC"/>
+                        <a:srgbClr val="E1E9F5"/>
                       </a:solidFill>
                       <a:prstDash val="solid"/>
                       <a:round/>
@@ -11734,7 +11782,7 @@
                   <a:tcPr marL="91440" marR="91440" marT="45720" marB="45720" anchor="ctr">
                     <a:lnL w="6350" cap="flat" cmpd="sng" algn="ctr">
                       <a:solidFill>
-                        <a:srgbClr val="E1E6EC"/>
+                        <a:srgbClr val="E1E9F5"/>
                       </a:solidFill>
                       <a:prstDash val="solid"/>
                       <a:round/>
@@ -11743,7 +11791,7 @@
                     </a:lnL>
                     <a:lnR w="6350" cap="flat" cmpd="sng" algn="ctr">
                       <a:solidFill>
-                        <a:srgbClr val="E1E6EC"/>
+                        <a:srgbClr val="E1E9F5"/>
                       </a:solidFill>
                       <a:prstDash val="solid"/>
                       <a:round/>
@@ -11752,7 +11800,7 @@
                     </a:lnR>
                     <a:lnT w="6350" cap="flat" cmpd="sng" algn="ctr">
                       <a:solidFill>
-                        <a:srgbClr val="E1E6EC"/>
+                        <a:srgbClr val="E1E9F5"/>
                       </a:solidFill>
                       <a:prstDash val="solid"/>
                       <a:round/>
@@ -11761,7 +11809,7 @@
                     </a:lnT>
                     <a:lnB w="6350" cap="flat" cmpd="sng" algn="ctr">
                       <a:solidFill>
-                        <a:srgbClr val="E1E6EC"/>
+                        <a:srgbClr val="E1E9F5"/>
                       </a:solidFill>
                       <a:prstDash val="solid"/>
                       <a:round/>
@@ -11784,7 +11832,7 @@
                       <a:r>
                         <a:rPr lang="en-US" sz="900" dirty="0">
                           <a:solidFill>
-                            <a:srgbClr val="4A5563"/>
+                            <a:srgbClr val="3C485C"/>
                           </a:solidFill>
                           <a:latin typeface="Calibri" pitchFamily="34" charset="0"/>
                           <a:ea typeface="Calibri" pitchFamily="34" charset="-122"/>
@@ -11802,7 +11850,7 @@
                   <a:tcPr marL="91440" marR="91440" marT="45720" marB="45720" anchor="ctr">
                     <a:lnL w="6350" cap="flat" cmpd="sng" algn="ctr">
                       <a:solidFill>
-                        <a:srgbClr val="E1E6EC"/>
+                        <a:srgbClr val="E1E9F5"/>
                       </a:solidFill>
                       <a:prstDash val="solid"/>
                       <a:round/>
@@ -11811,7 +11859,7 @@
                     </a:lnL>
                     <a:lnR w="6350" cap="flat" cmpd="sng" algn="ctr">
                       <a:solidFill>
-                        <a:srgbClr val="E1E6EC"/>
+                        <a:srgbClr val="E1E9F5"/>
                       </a:solidFill>
                       <a:prstDash val="solid"/>
                       <a:round/>
@@ -11820,7 +11868,7 @@
                     </a:lnR>
                     <a:lnT w="6350" cap="flat" cmpd="sng" algn="ctr">
                       <a:solidFill>
-                        <a:srgbClr val="E1E6EC"/>
+                        <a:srgbClr val="E1E9F5"/>
                       </a:solidFill>
                       <a:prstDash val="solid"/>
                       <a:round/>
@@ -11829,7 +11877,7 @@
                     </a:lnT>
                     <a:lnB w="6350" cap="flat" cmpd="sng" algn="ctr">
                       <a:solidFill>
-                        <a:srgbClr val="E1E6EC"/>
+                        <a:srgbClr val="E1E9F5"/>
                       </a:solidFill>
                       <a:prstDash val="solid"/>
                       <a:round/>
@@ -11870,7 +11918,7 @@
                   <a:tcPr marL="91440" marR="91440" marT="45720" marB="45720" anchor="ctr">
                     <a:lnL w="6350" cap="flat" cmpd="sng" algn="ctr">
                       <a:solidFill>
-                        <a:srgbClr val="E1E6EC"/>
+                        <a:srgbClr val="E1E9F5"/>
                       </a:solidFill>
                       <a:prstDash val="solid"/>
                       <a:round/>
@@ -11879,7 +11927,7 @@
                     </a:lnL>
                     <a:lnR w="6350" cap="flat" cmpd="sng" algn="ctr">
                       <a:solidFill>
-                        <a:srgbClr val="E1E6EC"/>
+                        <a:srgbClr val="E1E9F5"/>
                       </a:solidFill>
                       <a:prstDash val="solid"/>
                       <a:round/>
@@ -11888,7 +11936,7 @@
                     </a:lnR>
                     <a:lnT w="6350" cap="flat" cmpd="sng" algn="ctr">
                       <a:solidFill>
-                        <a:srgbClr val="E1E6EC"/>
+                        <a:srgbClr val="E1E9F5"/>
                       </a:solidFill>
                       <a:prstDash val="solid"/>
                       <a:round/>
@@ -11897,7 +11945,7 @@
                     </a:lnT>
                     <a:lnB w="6350" cap="flat" cmpd="sng" algn="ctr">
                       <a:solidFill>
-                        <a:srgbClr val="E1E6EC"/>
+                        <a:srgbClr val="E1E9F5"/>
                       </a:solidFill>
                       <a:prstDash val="solid"/>
                       <a:round/>
@@ -11922,7 +11970,7 @@
                       <a:r>
                         <a:rPr lang="en-US" sz="900" dirty="0">
                           <a:solidFill>
-                            <a:srgbClr val="4A5563"/>
+                            <a:srgbClr val="3C485C"/>
                           </a:solidFill>
                           <a:latin typeface="Calibri" pitchFamily="34" charset="0"/>
                           <a:ea typeface="Calibri" pitchFamily="34" charset="-122"/>
@@ -11940,7 +11988,7 @@
                   <a:tcPr marL="91440" marR="91440" marT="45720" marB="45720" anchor="ctr">
                     <a:lnL w="6350" cap="flat" cmpd="sng" algn="ctr">
                       <a:solidFill>
-                        <a:srgbClr val="E1E6EC"/>
+                        <a:srgbClr val="E1E9F5"/>
                       </a:solidFill>
                       <a:prstDash val="solid"/>
                       <a:round/>
@@ -11949,7 +11997,7 @@
                     </a:lnL>
                     <a:lnR w="6350" cap="flat" cmpd="sng" algn="ctr">
                       <a:solidFill>
-                        <a:srgbClr val="E1E6EC"/>
+                        <a:srgbClr val="E1E9F5"/>
                       </a:solidFill>
                       <a:prstDash val="solid"/>
                       <a:round/>
@@ -11958,7 +12006,7 @@
                     </a:lnR>
                     <a:lnT w="6350" cap="flat" cmpd="sng" algn="ctr">
                       <a:solidFill>
-                        <a:srgbClr val="E1E6EC"/>
+                        <a:srgbClr val="E1E9F5"/>
                       </a:solidFill>
                       <a:prstDash val="solid"/>
                       <a:round/>
@@ -11967,7 +12015,7 @@
                     </a:lnT>
                     <a:lnB w="6350" cap="flat" cmpd="sng" algn="ctr">
                       <a:solidFill>
-                        <a:srgbClr val="E1E6EC"/>
+                        <a:srgbClr val="E1E9F5"/>
                       </a:solidFill>
                       <a:prstDash val="solid"/>
                       <a:round/>
@@ -12008,7 +12056,7 @@
                   <a:tcPr marL="91440" marR="91440" marT="45720" marB="45720" anchor="ctr">
                     <a:lnL w="6350" cap="flat" cmpd="sng" algn="ctr">
                       <a:solidFill>
-                        <a:srgbClr val="E1E6EC"/>
+                        <a:srgbClr val="E1E9F5"/>
                       </a:solidFill>
                       <a:prstDash val="solid"/>
                       <a:round/>
@@ -12017,7 +12065,7 @@
                     </a:lnL>
                     <a:lnR w="6350" cap="flat" cmpd="sng" algn="ctr">
                       <a:solidFill>
-                        <a:srgbClr val="E1E6EC"/>
+                        <a:srgbClr val="E1E9F5"/>
                       </a:solidFill>
                       <a:prstDash val="solid"/>
                       <a:round/>
@@ -12026,7 +12074,7 @@
                     </a:lnR>
                     <a:lnT w="6350" cap="flat" cmpd="sng" algn="ctr">
                       <a:solidFill>
-                        <a:srgbClr val="E1E6EC"/>
+                        <a:srgbClr val="E1E9F5"/>
                       </a:solidFill>
                       <a:prstDash val="solid"/>
                       <a:round/>
@@ -12035,7 +12083,7 @@
                     </a:lnT>
                     <a:lnB w="6350" cap="flat" cmpd="sng" algn="ctr">
                       <a:solidFill>
-                        <a:srgbClr val="E1E6EC"/>
+                        <a:srgbClr val="E1E9F5"/>
                       </a:solidFill>
                       <a:prstDash val="solid"/>
                       <a:round/>
@@ -12076,7 +12124,7 @@
                   <a:tcPr marL="91440" marR="91440" marT="45720" marB="45720" anchor="ctr">
                     <a:lnL w="6350" cap="flat" cmpd="sng" algn="ctr">
                       <a:solidFill>
-                        <a:srgbClr val="E1E6EC"/>
+                        <a:srgbClr val="E1E9F5"/>
                       </a:solidFill>
                       <a:prstDash val="solid"/>
                       <a:round/>
@@ -12085,7 +12133,7 @@
                     </a:lnL>
                     <a:lnR w="6350" cap="flat" cmpd="sng" algn="ctr">
                       <a:solidFill>
-                        <a:srgbClr val="E1E6EC"/>
+                        <a:srgbClr val="E1E9F5"/>
                       </a:solidFill>
                       <a:prstDash val="solid"/>
                       <a:round/>
@@ -12094,7 +12142,7 @@
                     </a:lnR>
                     <a:lnT w="6350" cap="flat" cmpd="sng" algn="ctr">
                       <a:solidFill>
-                        <a:srgbClr val="E1E6EC"/>
+                        <a:srgbClr val="E1E9F5"/>
                       </a:solidFill>
                       <a:prstDash val="solid"/>
                       <a:round/>
@@ -12103,7 +12151,7 @@
                     </a:lnT>
                     <a:lnB w="6350" cap="flat" cmpd="sng" algn="ctr">
                       <a:solidFill>
-                        <a:srgbClr val="E1E6EC"/>
+                        <a:srgbClr val="E1E9F5"/>
                       </a:solidFill>
                       <a:prstDash val="solid"/>
                       <a:round/>
@@ -12126,7 +12174,7 @@
                       <a:r>
                         <a:rPr lang="en-US" sz="900" dirty="0">
                           <a:solidFill>
-                            <a:srgbClr val="4A5563"/>
+                            <a:srgbClr val="3C485C"/>
                           </a:solidFill>
                           <a:latin typeface="Calibri" pitchFamily="34" charset="0"/>
                           <a:ea typeface="Calibri" pitchFamily="34" charset="-122"/>
@@ -12144,7 +12192,7 @@
                   <a:tcPr marL="91440" marR="91440" marT="45720" marB="45720" anchor="ctr">
                     <a:lnL w="6350" cap="flat" cmpd="sng" algn="ctr">
                       <a:solidFill>
-                        <a:srgbClr val="E1E6EC"/>
+                        <a:srgbClr val="E1E9F5"/>
                       </a:solidFill>
                       <a:prstDash val="solid"/>
                       <a:round/>
@@ -12153,7 +12201,7 @@
                     </a:lnL>
                     <a:lnR w="6350" cap="flat" cmpd="sng" algn="ctr">
                       <a:solidFill>
-                        <a:srgbClr val="E1E6EC"/>
+                        <a:srgbClr val="E1E9F5"/>
                       </a:solidFill>
                       <a:prstDash val="solid"/>
                       <a:round/>
@@ -12162,7 +12210,7 @@
                     </a:lnR>
                     <a:lnT w="6350" cap="flat" cmpd="sng" algn="ctr">
                       <a:solidFill>
-                        <a:srgbClr val="E1E6EC"/>
+                        <a:srgbClr val="E1E9F5"/>
                       </a:solidFill>
                       <a:prstDash val="solid"/>
                       <a:round/>
@@ -12171,7 +12219,7 @@
                     </a:lnT>
                     <a:lnB w="6350" cap="flat" cmpd="sng" algn="ctr">
                       <a:solidFill>
-                        <a:srgbClr val="E1E6EC"/>
+                        <a:srgbClr val="E1E9F5"/>
                       </a:solidFill>
                       <a:prstDash val="solid"/>
                       <a:round/>
@@ -12212,7 +12260,7 @@
                   <a:tcPr marL="91440" marR="91440" marT="45720" marB="45720" anchor="ctr">
                     <a:lnL w="6350" cap="flat" cmpd="sng" algn="ctr">
                       <a:solidFill>
-                        <a:srgbClr val="E1E6EC"/>
+                        <a:srgbClr val="E1E9F5"/>
                       </a:solidFill>
                       <a:prstDash val="solid"/>
                       <a:round/>
@@ -12221,7 +12269,7 @@
                     </a:lnL>
                     <a:lnR w="6350" cap="flat" cmpd="sng" algn="ctr">
                       <a:solidFill>
-                        <a:srgbClr val="E1E6EC"/>
+                        <a:srgbClr val="E1E9F5"/>
                       </a:solidFill>
                       <a:prstDash val="solid"/>
                       <a:round/>
@@ -12230,7 +12278,7 @@
                     </a:lnR>
                     <a:lnT w="6350" cap="flat" cmpd="sng" algn="ctr">
                       <a:solidFill>
-                        <a:srgbClr val="E1E6EC"/>
+                        <a:srgbClr val="E1E9F5"/>
                       </a:solidFill>
                       <a:prstDash val="solid"/>
                       <a:round/>
@@ -12239,7 +12287,7 @@
                     </a:lnT>
                     <a:lnB w="6350" cap="flat" cmpd="sng" algn="ctr">
                       <a:solidFill>
-                        <a:srgbClr val="E1E6EC"/>
+                        <a:srgbClr val="E1E9F5"/>
                       </a:solidFill>
                       <a:prstDash val="solid"/>
                       <a:round/>
@@ -12264,7 +12312,7 @@
                       <a:r>
                         <a:rPr lang="en-US" sz="900" dirty="0">
                           <a:solidFill>
-                            <a:srgbClr val="4A5563"/>
+                            <a:srgbClr val="3C485C"/>
                           </a:solidFill>
                           <a:latin typeface="Calibri" pitchFamily="34" charset="0"/>
                           <a:ea typeface="Calibri" pitchFamily="34" charset="-122"/>
@@ -12282,7 +12330,7 @@
                   <a:tcPr marL="91440" marR="91440" marT="45720" marB="45720" anchor="ctr">
                     <a:lnL w="6350" cap="flat" cmpd="sng" algn="ctr">
                       <a:solidFill>
-                        <a:srgbClr val="E1E6EC"/>
+                        <a:srgbClr val="E1E9F5"/>
                       </a:solidFill>
                       <a:prstDash val="solid"/>
                       <a:round/>
@@ -12291,7 +12339,7 @@
                     </a:lnL>
                     <a:lnR w="6350" cap="flat" cmpd="sng" algn="ctr">
                       <a:solidFill>
-                        <a:srgbClr val="E1E6EC"/>
+                        <a:srgbClr val="E1E9F5"/>
                       </a:solidFill>
                       <a:prstDash val="solid"/>
                       <a:round/>
@@ -12300,7 +12348,7 @@
                     </a:lnR>
                     <a:lnT w="6350" cap="flat" cmpd="sng" algn="ctr">
                       <a:solidFill>
-                        <a:srgbClr val="E1E6EC"/>
+                        <a:srgbClr val="E1E9F5"/>
                       </a:solidFill>
                       <a:prstDash val="solid"/>
                       <a:round/>
@@ -12309,7 +12357,7 @@
                     </a:lnT>
                     <a:lnB w="6350" cap="flat" cmpd="sng" algn="ctr">
                       <a:solidFill>
-                        <a:srgbClr val="E1E6EC"/>
+                        <a:srgbClr val="E1E9F5"/>
                       </a:solidFill>
                       <a:prstDash val="solid"/>
                       <a:round/>
@@ -12350,7 +12398,7 @@
                   <a:tcPr marL="91440" marR="91440" marT="45720" marB="45720" anchor="ctr">
                     <a:lnL w="6350" cap="flat" cmpd="sng" algn="ctr">
                       <a:solidFill>
-                        <a:srgbClr val="E1E6EC"/>
+                        <a:srgbClr val="E1E9F5"/>
                       </a:solidFill>
                       <a:prstDash val="solid"/>
                       <a:round/>
@@ -12359,7 +12407,7 @@
                     </a:lnL>
                     <a:lnR w="6350" cap="flat" cmpd="sng" algn="ctr">
                       <a:solidFill>
-                        <a:srgbClr val="E1E6EC"/>
+                        <a:srgbClr val="E1E9F5"/>
                       </a:solidFill>
                       <a:prstDash val="solid"/>
                       <a:round/>
@@ -12368,7 +12416,7 @@
                     </a:lnR>
                     <a:lnT w="6350" cap="flat" cmpd="sng" algn="ctr">
                       <a:solidFill>
-                        <a:srgbClr val="E1E6EC"/>
+                        <a:srgbClr val="E1E9F5"/>
                       </a:solidFill>
                       <a:prstDash val="solid"/>
                       <a:round/>
@@ -12377,7 +12425,7 @@
                     </a:lnT>
                     <a:lnB w="6350" cap="flat" cmpd="sng" algn="ctr">
                       <a:solidFill>
-                        <a:srgbClr val="E1E6EC"/>
+                        <a:srgbClr val="E1E9F5"/>
                       </a:solidFill>
                       <a:prstDash val="solid"/>
                       <a:round/>
@@ -12418,7 +12466,7 @@
                   <a:tcPr marL="91440" marR="91440" marT="45720" marB="45720" anchor="ctr">
                     <a:lnL w="6350" cap="flat" cmpd="sng" algn="ctr">
                       <a:solidFill>
-                        <a:srgbClr val="E1E6EC"/>
+                        <a:srgbClr val="E1E9F5"/>
                       </a:solidFill>
                       <a:prstDash val="solid"/>
                       <a:round/>
@@ -12427,7 +12475,7 @@
                     </a:lnL>
                     <a:lnR w="6350" cap="flat" cmpd="sng" algn="ctr">
                       <a:solidFill>
-                        <a:srgbClr val="E1E6EC"/>
+                        <a:srgbClr val="E1E9F5"/>
                       </a:solidFill>
                       <a:prstDash val="solid"/>
                       <a:round/>
@@ -12436,7 +12484,7 @@
                     </a:lnR>
                     <a:lnT w="6350" cap="flat" cmpd="sng" algn="ctr">
                       <a:solidFill>
-                        <a:srgbClr val="E1E6EC"/>
+                        <a:srgbClr val="E1E9F5"/>
                       </a:solidFill>
                       <a:prstDash val="solid"/>
                       <a:round/>
@@ -12445,7 +12493,7 @@
                     </a:lnT>
                     <a:lnB w="6350" cap="flat" cmpd="sng" algn="ctr">
                       <a:solidFill>
-                        <a:srgbClr val="E1E6EC"/>
+                        <a:srgbClr val="E1E9F5"/>
                       </a:solidFill>
                       <a:prstDash val="solid"/>
                       <a:round/>
@@ -12468,7 +12516,7 @@
                       <a:r>
                         <a:rPr lang="en-US" sz="900" dirty="0">
                           <a:solidFill>
-                            <a:srgbClr val="4A5563"/>
+                            <a:srgbClr val="3C485C"/>
                           </a:solidFill>
                           <a:latin typeface="Calibri" pitchFamily="34" charset="0"/>
                           <a:ea typeface="Calibri" pitchFamily="34" charset="-122"/>
@@ -12486,7 +12534,7 @@
                   <a:tcPr marL="91440" marR="91440" marT="45720" marB="45720" anchor="ctr">
                     <a:lnL w="6350" cap="flat" cmpd="sng" algn="ctr">
                       <a:solidFill>
-                        <a:srgbClr val="E1E6EC"/>
+                        <a:srgbClr val="E1E9F5"/>
                       </a:solidFill>
                       <a:prstDash val="solid"/>
                       <a:round/>
@@ -12495,7 +12543,7 @@
                     </a:lnL>
                     <a:lnR w="6350" cap="flat" cmpd="sng" algn="ctr">
                       <a:solidFill>
-                        <a:srgbClr val="E1E6EC"/>
+                        <a:srgbClr val="E1E9F5"/>
                       </a:solidFill>
                       <a:prstDash val="solid"/>
                       <a:round/>
@@ -12504,7 +12552,7 @@
                     </a:lnR>
                     <a:lnT w="6350" cap="flat" cmpd="sng" algn="ctr">
                       <a:solidFill>
-                        <a:srgbClr val="E1E6EC"/>
+                        <a:srgbClr val="E1E9F5"/>
                       </a:solidFill>
                       <a:prstDash val="solid"/>
                       <a:round/>
@@ -12513,7 +12561,7 @@
                     </a:lnT>
                     <a:lnB w="6350" cap="flat" cmpd="sng" algn="ctr">
                       <a:solidFill>
-                        <a:srgbClr val="E1E6EC"/>
+                        <a:srgbClr val="E1E9F5"/>
                       </a:solidFill>
                       <a:prstDash val="solid"/>
                       <a:round/>
@@ -12554,7 +12602,7 @@
                   <a:tcPr marL="91440" marR="91440" marT="45720" marB="45720" anchor="ctr">
                     <a:lnL w="6350" cap="flat" cmpd="sng" algn="ctr">
                       <a:solidFill>
-                        <a:srgbClr val="E1E6EC"/>
+                        <a:srgbClr val="E1E9F5"/>
                       </a:solidFill>
                       <a:prstDash val="solid"/>
                       <a:round/>
@@ -12563,7 +12611,7 @@
                     </a:lnL>
                     <a:lnR w="6350" cap="flat" cmpd="sng" algn="ctr">
                       <a:solidFill>
-                        <a:srgbClr val="E1E6EC"/>
+                        <a:srgbClr val="E1E9F5"/>
                       </a:solidFill>
                       <a:prstDash val="solid"/>
                       <a:round/>
@@ -12572,7 +12620,7 @@
                     </a:lnR>
                     <a:lnT w="6350" cap="flat" cmpd="sng" algn="ctr">
                       <a:solidFill>
-                        <a:srgbClr val="E1E6EC"/>
+                        <a:srgbClr val="E1E9F5"/>
                       </a:solidFill>
                       <a:prstDash val="solid"/>
                       <a:round/>
@@ -12581,7 +12629,7 @@
                     </a:lnT>
                     <a:lnB w="6350" cap="flat" cmpd="sng" algn="ctr">
                       <a:solidFill>
-                        <a:srgbClr val="E1E6EC"/>
+                        <a:srgbClr val="E1E9F5"/>
                       </a:solidFill>
                       <a:prstDash val="solid"/>
                       <a:round/>
@@ -12625,7 +12673,7 @@
             <a:r>
               <a:rPr lang="en-US" sz="850" i="1" dirty="0">
                 <a:solidFill>
-                  <a:srgbClr val="7A8594"/>
+                  <a:srgbClr val="5B6982"/>
                 </a:solidFill>
                 <a:latin typeface="Calibri" pitchFamily="34" charset="0"/>
                 <a:ea typeface="Calibri" pitchFamily="34" charset="-122"/>
@@ -12658,7 +12706,7 @@
           </a:solidFill>
           <a:ln w="9525">
             <a:solidFill>
-              <a:srgbClr val="C9D0DA"/>
+              <a:srgbClr val="C9D6EC"/>
             </a:solidFill>
             <a:prstDash val="solid"/>
           </a:ln>
@@ -12708,7 +12756,7 @@
           </a:solidFill>
           <a:ln w="9525">
             <a:solidFill>
-              <a:srgbClr val="C9D0DA"/>
+              <a:srgbClr val="C9D6EC"/>
             </a:solidFill>
             <a:prstDash val="solid"/>
           </a:ln>
@@ -12764,7 +12812,7 @@
             <a:r>
               <a:rPr lang="en-US" sz="800" dirty="0">
                 <a:solidFill>
-                  <a:srgbClr val="7A8594"/>
+                  <a:srgbClr val="5B6982"/>
                 </a:solidFill>
                 <a:latin typeface="Courier New" pitchFamily="34" charset="0"/>
                 <a:ea typeface="Courier New" pitchFamily="34" charset="-122"/>
@@ -12803,7 +12851,7 @@
             <a:r>
               <a:rPr lang="en-US" sz="800" dirty="0">
                 <a:solidFill>
-                  <a:srgbClr val="7A8594"/>
+                  <a:srgbClr val="5B6982"/>
                 </a:solidFill>
                 <a:latin typeface="Courier New" pitchFamily="34" charset="0"/>
                 <a:ea typeface="Courier New" pitchFamily="34" charset="-122"/>
@@ -12832,7 +12880,7 @@
           <a:noFill/>
           <a:ln w="15875">
             <a:solidFill>
-              <a:srgbClr val="1F4FA8"/>
+              <a:srgbClr val="155DD3"/>
             </a:solidFill>
             <a:prstDash val="solid"/>
             <a:headEnd type="triangle"/>
@@ -12857,7 +12905,7 @@
           <a:noFill/>
           <a:ln w="12700">
             <a:solidFill>
-              <a:srgbClr val="1F4FA8"/>
+              <a:srgbClr val="155DD3"/>
             </a:solidFill>
             <a:prstDash val="solid"/>
           </a:ln>
@@ -12880,7 +12928,7 @@
           <a:noFill/>
           <a:ln w="12700">
             <a:solidFill>
-              <a:srgbClr val="1F4FA8"/>
+              <a:srgbClr val="155DD3"/>
             </a:solidFill>
             <a:prstDash val="solid"/>
           </a:ln>
@@ -12901,7 +12949,7 @@
             <a:avLst/>
           </a:prstGeom>
           <a:solidFill>
-            <a:srgbClr val="FAFBFC"/>
+            <a:srgbClr val="F3F7FE"/>
           </a:solidFill>
           <a:ln/>
         </p:spPr>
@@ -12915,7 +12963,7 @@
             <a:r>
               <a:rPr lang="en-US" sz="1150" b="1" dirty="0">
                 <a:solidFill>
-                  <a:srgbClr val="1F4FA8"/>
+                  <a:srgbClr val="155DD3"/>
                 </a:solidFill>
                 <a:latin typeface="Courier New" pitchFamily="34" charset="0"/>
                 <a:ea typeface="Courier New" pitchFamily="34" charset="-122"/>
@@ -12954,7 +13002,7 @@
             <a:r>
               <a:rPr lang="en-US" sz="1100" dirty="0">
                 <a:solidFill>
-                  <a:srgbClr val="7A8594"/>
+                  <a:srgbClr val="5B6982"/>
                 </a:solidFill>
                 <a:latin typeface="Calibri" pitchFamily="34" charset="0"/>
                 <a:ea typeface="Calibri" pitchFamily="34" charset="-122"/>
@@ -12983,7 +13031,7 @@
           <a:noFill/>
           <a:ln w="15875">
             <a:solidFill>
-              <a:srgbClr val="1F4FA8"/>
+              <a:srgbClr val="155DD3"/>
             </a:solidFill>
             <a:prstDash val="solid"/>
             <a:headEnd type="triangle"/>
@@ -13008,7 +13056,7 @@
           <a:noFill/>
           <a:ln w="12700">
             <a:solidFill>
-              <a:srgbClr val="1F4FA8"/>
+              <a:srgbClr val="155DD3"/>
             </a:solidFill>
             <a:prstDash val="solid"/>
           </a:ln>
@@ -13031,7 +13079,7 @@
           <a:noFill/>
           <a:ln w="12700">
             <a:solidFill>
-              <a:srgbClr val="1F4FA8"/>
+              <a:srgbClr val="155DD3"/>
             </a:solidFill>
             <a:prstDash val="solid"/>
           </a:ln>
@@ -13052,7 +13100,7 @@
             <a:avLst/>
           </a:prstGeom>
           <a:solidFill>
-            <a:srgbClr val="FAFBFC"/>
+            <a:srgbClr val="F3F7FE"/>
           </a:solidFill>
           <a:ln/>
         </p:spPr>
@@ -13066,7 +13114,7 @@
             <a:r>
               <a:rPr lang="en-US" sz="1300" b="1" dirty="0">
                 <a:solidFill>
-                  <a:srgbClr val="1F4FA8"/>
+                  <a:srgbClr val="155DD3"/>
                 </a:solidFill>
                 <a:latin typeface="Courier New" pitchFamily="34" charset="0"/>
                 <a:ea typeface="Courier New" pitchFamily="34" charset="-122"/>
@@ -13105,7 +13153,7 @@
             <a:r>
               <a:rPr lang="en-US" sz="1100" dirty="0">
                 <a:solidFill>
-                  <a:srgbClr val="7A8594"/>
+                  <a:srgbClr val="5B6982"/>
                 </a:solidFill>
                 <a:latin typeface="Calibri" pitchFamily="34" charset="0"/>
                 <a:ea typeface="Calibri" pitchFamily="34" charset="-122"/>
@@ -13134,7 +13182,7 @@
           <a:noFill/>
           <a:ln w="15875">
             <a:solidFill>
-              <a:srgbClr val="1F4FA8"/>
+              <a:srgbClr val="155DD3"/>
             </a:solidFill>
             <a:prstDash val="solid"/>
             <a:headEnd type="triangle"/>
@@ -13159,7 +13207,7 @@
           <a:noFill/>
           <a:ln w="12700">
             <a:solidFill>
-              <a:srgbClr val="1F4FA8"/>
+              <a:srgbClr val="155DD3"/>
             </a:solidFill>
             <a:prstDash val="solid"/>
           </a:ln>
@@ -13182,7 +13230,7 @@
           <a:noFill/>
           <a:ln w="12700">
             <a:solidFill>
-              <a:srgbClr val="1F4FA8"/>
+              <a:srgbClr val="155DD3"/>
             </a:solidFill>
             <a:prstDash val="solid"/>
           </a:ln>
@@ -13196,14 +13244,14 @@
         </p:nvSpPr>
         <p:spPr>
           <a:xfrm>
-            <a:off x="6629400" y="3136392"/>
-            <a:ext cx="1371600" cy="384048"/>
+            <a:off x="6574536" y="3136392"/>
+            <a:ext cx="1481328" cy="384048"/>
           </a:xfrm>
           <a:prstGeom prst="rect">
             <a:avLst/>
           </a:prstGeom>
           <a:solidFill>
-            <a:srgbClr val="FAFBFC"/>
+            <a:srgbClr val="F3F7FE"/>
           </a:solidFill>
           <a:ln/>
         </p:spPr>
@@ -13217,13 +13265,13 @@
             <a:r>
               <a:rPr lang="en-US" sz="1300" b="1" dirty="0">
                 <a:solidFill>
-                  <a:srgbClr val="1F4FA8"/>
+                  <a:srgbClr val="155DD3"/>
                 </a:solidFill>
                 <a:latin typeface="Courier New" pitchFamily="34" charset="0"/>
                 <a:ea typeface="Courier New" pitchFamily="34" charset="-122"/>
                 <a:cs typeface="Courier New" pitchFamily="34" charset="-120"/>
               </a:rPr>
-              <a:t>96 tests</a:t>
+              <a:t>≤ 0.05 mm</a:t>
             </a:r>
             <a:endParaRPr lang="en-US" sz="1300" dirty="0"/>
           </a:p>
@@ -13256,13 +13304,13 @@
             <a:r>
               <a:rPr lang="en-US" sz="1100" dirty="0">
                 <a:solidFill>
-                  <a:srgbClr val="7A8594"/>
+                  <a:srgbClr val="5B6982"/>
                 </a:solidFill>
                 <a:latin typeface="Calibri" pitchFamily="34" charset="0"/>
                 <a:ea typeface="Calibri" pitchFamily="34" charset="-122"/>
                 <a:cs typeface="Calibri" pitchFamily="34" charset="-120"/>
               </a:rPr>
-              <a:t>no model needed: geometry ≤0.05 mm, interference ≤3 %, measurement ≤0.5 mm, API end to end</a:t>
+              <a:t>the toolchain on known geometry: circle fits, interference ≤3 %, measurement ≤0.5 mm — before any model</a:t>
             </a:r>
             <a:endParaRPr lang="en-US" sz="1100" dirty="0"/>
           </a:p>
@@ -13285,7 +13333,7 @@
           <a:noFill/>
           <a:ln w="15875">
             <a:solidFill>
-              <a:srgbClr val="1F4FA8"/>
+              <a:srgbClr val="155DD3"/>
             </a:solidFill>
             <a:prstDash val="solid"/>
             <a:headEnd type="triangle"/>
@@ -13310,7 +13358,7 @@
           <a:noFill/>
           <a:ln w="12700">
             <a:solidFill>
-              <a:srgbClr val="1F4FA8"/>
+              <a:srgbClr val="155DD3"/>
             </a:solidFill>
             <a:prstDash val="solid"/>
           </a:ln>
@@ -13333,7 +13381,7 @@
           <a:noFill/>
           <a:ln w="12700">
             <a:solidFill>
-              <a:srgbClr val="1F4FA8"/>
+              <a:srgbClr val="155DD3"/>
             </a:solidFill>
             <a:prstDash val="solid"/>
           </a:ln>
@@ -13354,7 +13402,7 @@
             <a:avLst/>
           </a:prstGeom>
           <a:solidFill>
-            <a:srgbClr val="FAFBFC"/>
+            <a:srgbClr val="F3F7FE"/>
           </a:solidFill>
           <a:ln/>
         </p:spPr>
@@ -13368,7 +13416,7 @@
             <a:r>
               <a:rPr lang="en-US" sz="1300" b="1" dirty="0">
                 <a:solidFill>
-                  <a:srgbClr val="1F4FA8"/>
+                  <a:srgbClr val="155DD3"/>
                 </a:solidFill>
                 <a:latin typeface="Courier New" pitchFamily="34" charset="0"/>
                 <a:ea typeface="Courier New" pitchFamily="34" charset="-122"/>
@@ -13407,7 +13455,7 @@
             <a:r>
               <a:rPr lang="en-US" sz="1100" dirty="0">
                 <a:solidFill>
-                  <a:srgbClr val="7A8594"/>
+                  <a:srgbClr val="5B6982"/>
                 </a:solidFill>
                 <a:latin typeface="Calibri" pitchFamily="34" charset="0"/>
                 <a:ea typeface="Calibri" pitchFamily="34" charset="-122"/>
@@ -13433,7 +13481,7 @@
     <p:bg>
       <p:bgPr>
         <a:solidFill>
-          <a:srgbClr val="FAFBFC"/>
+          <a:srgbClr val="F3F7FE"/>
         </a:solidFill>
       </p:bgPr>
     </p:bg>
@@ -13478,7 +13526,7 @@
             <a:r>
               <a:rPr lang="en-US" sz="2600" b="1" dirty="0">
                 <a:solidFill>
-                  <a:srgbClr val="18212C"/>
+                  <a:srgbClr val="05142E"/>
                 </a:solidFill>
                 <a:latin typeface="Arial" pitchFamily="34" charset="0"/>
                 <a:ea typeface="Arial" pitchFamily="34" charset="-122"/>
@@ -13511,7 +13559,7 @@
           </a:solidFill>
           <a:ln w="9525">
             <a:solidFill>
-              <a:srgbClr val="C9D0DA"/>
+              <a:srgbClr val="C9D6EC"/>
             </a:solidFill>
             <a:prstDash val="solid"/>
           </a:ln>
@@ -13591,7 +13639,7 @@
             <a:r>
               <a:rPr lang="en-US" sz="1150" b="1" dirty="0">
                 <a:solidFill>
-                  <a:srgbClr val="18212C"/>
+                  <a:srgbClr val="05142E"/>
                 </a:solidFill>
                 <a:latin typeface="Calibri" pitchFamily="34" charset="0"/>
                 <a:ea typeface="Calibri" pitchFamily="34" charset="-122"/>
@@ -13630,7 +13678,7 @@
             <a:r>
               <a:rPr lang="en-US" sz="950" dirty="0">
                 <a:solidFill>
-                  <a:srgbClr val="4A5563"/>
+                  <a:srgbClr val="3C485C"/>
                 </a:solidFill>
                 <a:latin typeface="Calibri" pitchFamily="34" charset="0"/>
                 <a:ea typeface="Calibri" pitchFamily="34" charset="-122"/>
@@ -13693,7 +13741,7 @@
             <a:r>
               <a:rPr lang="en-US" sz="1150" b="1" dirty="0">
                 <a:solidFill>
-                  <a:srgbClr val="18212C"/>
+                  <a:srgbClr val="05142E"/>
                 </a:solidFill>
                 <a:latin typeface="Calibri" pitchFamily="34" charset="0"/>
                 <a:ea typeface="Calibri" pitchFamily="34" charset="-122"/>
@@ -13732,7 +13780,7 @@
             <a:r>
               <a:rPr lang="en-US" sz="950" dirty="0">
                 <a:solidFill>
-                  <a:srgbClr val="4A5563"/>
+                  <a:srgbClr val="3C485C"/>
                 </a:solidFill>
                 <a:latin typeface="Calibri" pitchFamily="34" charset="0"/>
                 <a:ea typeface="Calibri" pitchFamily="34" charset="-122"/>
@@ -13795,7 +13843,7 @@
             <a:r>
               <a:rPr lang="en-US" sz="1150" b="1" dirty="0">
                 <a:solidFill>
-                  <a:srgbClr val="18212C"/>
+                  <a:srgbClr val="05142E"/>
                 </a:solidFill>
                 <a:latin typeface="Calibri" pitchFamily="34" charset="0"/>
                 <a:ea typeface="Calibri" pitchFamily="34" charset="-122"/>
@@ -13834,7 +13882,7 @@
             <a:r>
               <a:rPr lang="en-US" sz="950" dirty="0">
                 <a:solidFill>
-                  <a:srgbClr val="4A5563"/>
+                  <a:srgbClr val="3C485C"/>
                 </a:solidFill>
                 <a:latin typeface="Calibri" pitchFamily="34" charset="0"/>
                 <a:ea typeface="Calibri" pitchFamily="34" charset="-122"/>
@@ -13897,7 +13945,7 @@
             <a:r>
               <a:rPr lang="en-US" sz="1150" b="1" dirty="0">
                 <a:solidFill>
-                  <a:srgbClr val="18212C"/>
+                  <a:srgbClr val="05142E"/>
                 </a:solidFill>
                 <a:latin typeface="Calibri" pitchFamily="34" charset="0"/>
                 <a:ea typeface="Calibri" pitchFamily="34" charset="-122"/>
@@ -13936,7 +13984,7 @@
             <a:r>
               <a:rPr lang="en-US" sz="950" dirty="0">
                 <a:solidFill>
-                  <a:srgbClr val="4A5563"/>
+                  <a:srgbClr val="3C485C"/>
                 </a:solidFill>
                 <a:latin typeface="Calibri" pitchFamily="34" charset="0"/>
                 <a:ea typeface="Calibri" pitchFamily="34" charset="-122"/>
@@ -13975,7 +14023,7 @@
             <a:r>
               <a:rPr lang="en-US" sz="850" dirty="0">
                 <a:solidFill>
-                  <a:srgbClr val="7A8594"/>
+                  <a:srgbClr val="5B6982"/>
                 </a:solidFill>
                 <a:latin typeface="Courier New" pitchFamily="34" charset="0"/>
                 <a:ea typeface="Courier New" pitchFamily="34" charset="-122"/>

--- a/docs/submission/kintsugi-offgrid-pitch.pptx
+++ b/docs/submission/kintsugi-offgrid-pitch.pptx
@@ -13120,7 +13120,7 @@
                 <a:ea typeface="Courier New" pitchFamily="34" charset="-122"/>
                 <a:cs typeface="Courier New" pitchFamily="34" charset="-120"/>
               </a:rPr>
-              <a:t>4 / 5 caught †</a:t>
+              <a:t>2 / 3 caught †</a:t>
             </a:r>
             <a:endParaRPr lang="en-US" sz="1300" dirty="0"/>
           </a:p>
@@ -13159,7 +13159,7 @@
                 <a:ea typeface="Calibri" pitchFamily="34" charset="-122"/>
                 <a:cs typeface="Calibri" pitchFamily="34" charset="-120"/>
               </a:rPr>
-              <a:t>critic probe: injected defects invisible to the checks; control passes</a:t>
+              <a:t>critic probe: defects the numeric checks cannot see; control passes</a:t>
             </a:r>
             <a:endParaRPr lang="en-US" sz="1100" dirty="0"/>
           </a:p>
@@ -13395,8 +13395,8 @@
         </p:nvSpPr>
         <p:spPr>
           <a:xfrm>
-            <a:off x="6574536" y="4142232"/>
-            <a:ext cx="1481328" cy="384048"/>
+            <a:off x="6684264" y="4142232"/>
+            <a:ext cx="1261872" cy="384048"/>
           </a:xfrm>
           <a:prstGeom prst="rect">
             <a:avLst/>
@@ -13422,7 +13422,7 @@
                 <a:ea typeface="Courier New" pitchFamily="34" charset="-122"/>
                 <a:cs typeface="Courier New" pitchFamily="34" charset="-120"/>
               </a:rPr>
-              <a:t>1·1·1·2·7</a:t>
+              <a:t>1·1·1·7</a:t>
             </a:r>
             <a:endParaRPr lang="en-US" sz="1300" dirty="0"/>
           </a:p>
@@ -13461,7 +13461,7 @@
                 <a:ea typeface="Calibri" pitchFamily="34" charset="-122"/>
                 <a:cs typeface="Calibri" pitchFamily="34" charset="-120"/>
               </a:rPr>
-              <a:t>iterations to converge, five bottle-handle runs †</a:t>
+              <a:t>iterations to converge, four bottle-handle runs †</a:t>
             </a:r>
             <a:endParaRPr lang="en-US" sz="1100" dirty="0"/>
           </a:p>

--- a/docs/submission/kintsugi-offgrid-pitch.pptx
+++ b/docs/submission/kintsugi-offgrid-pitch.pptx
@@ -1856,7 +1856,7 @@
       </p:grpSpPr>
       <p:pic>
         <p:nvPicPr>
-          <p:cNvPr id="2" name="Image 0" descr="/home/claude/kintsugi/docs/submission/img/logo-mark.png">    </p:cNvPr>
+          <p:cNvPr id="2" name="Image 0" descr="X:\Code\26Projects\kitsug\docs\submission\img\logo-mark.png">    </p:cNvPr>
           <p:cNvPicPr>
             <a:picLocks noChangeAspect="1"/>
           </p:cNvPicPr>
@@ -2074,8 +2074,8 @@
         </p:nvSpPr>
         <p:spPr>
           <a:xfrm>
-            <a:off x="1069848" y="3547872"/>
-            <a:ext cx="2249424" cy="384048"/>
+            <a:off x="905256" y="3547872"/>
+            <a:ext cx="2578608" cy="384048"/>
           </a:xfrm>
           <a:prstGeom prst="rect">
             <a:avLst/>
@@ -2101,7 +2101,7 @@
                 <a:ea typeface="Courier New" pitchFamily="34" charset="-122"/>
                 <a:cs typeface="Courier New" pitchFamily="34" charset="-120"/>
               </a:rPr>
-              <a:t>3 photos → 1 STL</a:t>
+              <a:t>photos → spec → STL</a:t>
             </a:r>
             <a:endParaRPr lang="en-US" sz="1400" dirty="0"/>
           </a:p>
@@ -2231,7 +2231,7 @@
       </p:sp>
       <p:pic>
         <p:nvPicPr>
-          <p:cNvPr id="13" name="Image 1" descr="/home/claude/kintsugi/docs/submission/img/assembly_iso.png">    </p:cNvPr>
+          <p:cNvPr id="13" name="Image 1" descr="X:\Code\26Projects\kitsug\docs\submission\img\assembly_iso.png">    </p:cNvPr>
           <p:cNvPicPr>
             <a:picLocks noChangeAspect="1"/>
           </p:cNvPicPr>
@@ -4178,7 +4178,7 @@
                 <a:ea typeface="Courier New" pitchFamily="34" charset="-122"/>
                 <a:cs typeface="Courier New" pitchFamily="34" charset="-120"/>
               </a:rPr>
-              <a:t>36 commits</a:t>
+              <a:t>1 real GPT-6 run</a:t>
             </a:r>
             <a:endParaRPr lang="en-US" sz="1300" dirty="0"/>
           </a:p>
@@ -4217,7 +4217,7 @@
                 <a:ea typeface="Calibri" pitchFamily="34" charset="-122"/>
                 <a:cs typeface="Calibri" pitchFamily="34" charset="-120"/>
               </a:rPr>
-              <a:t>a log, not a launch</a:t>
+              <a:t>2 iterations · $1.01</a:t>
             </a:r>
             <a:endParaRPr lang="en-US" sz="1100" dirty="0"/>
           </a:p>
@@ -4302,8 +4302,8 @@
         </p:nvSpPr>
         <p:spPr>
           <a:xfrm>
-            <a:off x="2779776" y="2770632"/>
-            <a:ext cx="1481328" cy="384048"/>
+            <a:off x="2889504" y="2770632"/>
+            <a:ext cx="1261872" cy="384048"/>
           </a:xfrm>
           <a:prstGeom prst="rect">
             <a:avLst/>
@@ -4329,7 +4329,7 @@
                 <a:ea typeface="Courier New" pitchFamily="34" charset="-122"/>
                 <a:cs typeface="Courier New" pitchFamily="34" charset="-120"/>
               </a:rPr>
-              <a:t>18k lines</a:t>
+              <a:t>15 / 15</a:t>
             </a:r>
             <a:endParaRPr lang="en-US" sz="1300" dirty="0"/>
           </a:p>
@@ -4368,7 +4368,7 @@
                 <a:ea typeface="Calibri" pitchFamily="34" charset="-122"/>
                 <a:cs typeface="Calibri" pitchFamily="34" charset="-120"/>
               </a:rPr>
-              <a:t>Python · TypeScript · SCAD</a:t>
+              <a:t>checks pass on its mesh</a:t>
             </a:r>
             <a:endParaRPr lang="en-US" sz="1100" dirty="0"/>
           </a:p>
@@ -4712,7 +4712,7 @@
                 <a:ea typeface="Calibri" pitchFamily="34" charset="-122"/>
                 <a:cs typeface="Calibri" pitchFamily="34" charset="-120"/>
               </a:rPr>
-              <a:t>Every stage was walked by hand — real photos, real prints, the UI driven end to end in a browser after each change. Rough edges are listed in the hand-off doc, not hidden.</a:t>
+              <a:t>The UI was driven end to end in a headless browser at desktop and phone widths after each change; one real GPT-6 run is in eval/reports/gpt6-first-run. No real photo or print yet; rough edges are listed in docs/HANDOFF.md.</a:t>
             </a:r>
             <a:endParaRPr lang="en-US" sz="1050" dirty="0"/>
           </a:p>
@@ -4850,7 +4850,7 @@
       </p:grpSpPr>
       <p:pic>
         <p:nvPicPr>
-          <p:cNvPr id="2" name="Image 0" descr="/home/claude/kintsugi/docs/submission/img/logo-mark.png">    </p:cNvPr>
+          <p:cNvPr id="2" name="Image 0" descr="X:\Code\26Projects\kitsug\docs\submission\img\logo-mark.png">    </p:cNvPr>
           <p:cNvPicPr>
             <a:picLocks noChangeAspect="1"/>
           </p:cNvPicPr>
@@ -5000,7 +5000,7 @@
                 <a:ea typeface="Courier New" pitchFamily="34" charset="-122"/>
                 <a:cs typeface="Courier New" pitchFamily="34" charset="-120"/>
               </a:rPr>
-              <a:t>github.com/KrishGup/kintsugi   ·   demo: [link]   ·   video: [link]</a:t>
+              <a:t>github.com/KrishGup/kintsugi   ·   demo: kintsugi.orangecliff-df186167.eastus2.azurecontainerapps.io   ·   video: docs/submission/kintsugi-demo.mp4</a:t>
             </a:r>
             <a:endParaRPr lang="en-US" sz="1100" dirty="0"/>
           </a:p>
@@ -7187,7 +7187,7 @@
       </p:sp>
       <p:pic>
         <p:nvPicPr>
-          <p:cNvPr id="4" name="Image 0" descr="/home/claude/kintsugi/docs/submission/img/section_aa.png">    </p:cNvPr>
+          <p:cNvPr id="4" name="Image 0" descr="X:\Code\26Projects\kitsug\docs\submission\img\section_aa.png">    </p:cNvPr>
           <p:cNvPicPr>
             <a:picLocks noChangeAspect="1"/>
           </p:cNvPicPr>
@@ -7879,7 +7879,7 @@
       </p:sp>
       <p:pic>
         <p:nvPicPr>
-          <p:cNvPr id="4" name="Image 0" descr="/home/claude/kintsugi/docs/submission/img/capture_guide.png">    </p:cNvPr>
+          <p:cNvPr id="4" name="Image 0" descr="X:\Code\26Projects\kitsug\docs\submission\img\capture_guide.png">    </p:cNvPr>
           <p:cNvPicPr>
             <a:picLocks noChangeAspect="1"/>
           </p:cNvPicPr>
@@ -7929,7 +7929,7 @@
       </p:sp>
       <p:pic>
         <p:nvPicPr>
-          <p:cNvPr id="6" name="Image 1" descr="/home/claude/kintsugi/docs/submission/img/evidence_map.png">    </p:cNvPr>
+          <p:cNvPr id="6" name="Image 1" descr="X:\Code\26Projects\kitsug\docs\submission\img\evidence_map.png">    </p:cNvPr>
           <p:cNvPicPr>
             <a:picLocks noChangeAspect="1"/>
           </p:cNvPicPr>
@@ -8476,8 +8476,8 @@
         </p:nvSpPr>
         <p:spPr>
           <a:xfrm>
-            <a:off x="6409944" y="3319272"/>
-            <a:ext cx="1261872" cy="384048"/>
+            <a:off x="6300216" y="3319272"/>
+            <a:ext cx="1481328" cy="384048"/>
           </a:xfrm>
           <a:prstGeom prst="rect">
             <a:avLst/>
@@ -8503,7 +8503,7 @@
                 <a:ea typeface="Courier New" pitchFamily="34" charset="-122"/>
                 <a:cs typeface="Courier New" pitchFamily="34" charset="-120"/>
               </a:rPr>
-              <a:t>1 round</a:t>
+              <a:t>one round</a:t>
             </a:r>
             <a:endParaRPr lang="en-US" sz="1500" dirty="0"/>
           </a:p>
@@ -8542,7 +8542,7 @@
                 <a:ea typeface="Calibri" pitchFamily="34" charset="-122"/>
                 <a:cs typeface="Calibri" pitchFamily="34" charset="-120"/>
               </a:rPr>
-              <a:t>for the bottle handle: one sheet photo, one ruler reading, ready</a:t>
+              <a:t>the plan for the bottle handle: one sheet photo, one ruler reading (scripted demo)</a:t>
             </a:r>
             <a:endParaRPr lang="en-US" sz="1100" dirty="0"/>
           </a:p>
@@ -8687,7 +8687,7 @@
       </p:sp>
       <p:pic>
         <p:nvPicPr>
-          <p:cNvPr id="4" name="Image 0" descr="/home/claude/kintsugi/docs/submission/img/graph_pipeline.png">    </p:cNvPr>
+          <p:cNvPr id="4" name="Image 0" descr="X:\Code\26Projects\kitsug\docs\submission\img\graph_pipeline.png">    </p:cNvPr>
           <p:cNvPicPr>
             <a:picLocks noChangeAspect="1"/>
           </p:cNvPicPr>
@@ -8932,8 +8932,8 @@
         </p:nvSpPr>
         <p:spPr>
           <a:xfrm>
-            <a:off x="960120" y="4142232"/>
-            <a:ext cx="1371600" cy="384048"/>
+            <a:off x="640080" y="4142232"/>
+            <a:ext cx="2011680" cy="384048"/>
           </a:xfrm>
           <a:prstGeom prst="rect">
             <a:avLst/>
@@ -8959,7 +8959,7 @@
                 <a:ea typeface="Courier New" pitchFamily="34" charset="-122"/>
                 <a:cs typeface="Courier New" pitchFamily="34" charset="-120"/>
               </a:rPr>
-              <a:t>1.6–1.7×</a:t>
+              <a:t>checks ∥ sheets</a:t>
             </a:r>
             <a:endParaRPr lang="en-US" sz="1400" dirty="0"/>
           </a:p>
@@ -8998,7 +8998,7 @@
                 <a:ea typeface="Calibri" pitchFamily="34" charset="-122"/>
                 <a:cs typeface="Calibri" pitchFamily="34" charset="-120"/>
               </a:rPr>
-              <a:t>faster per iteration, two cores</a:t>
+              <a:t>rendered in parallel, every run traced</a:t>
             </a:r>
             <a:endParaRPr lang="en-US" sz="1100" dirty="0"/>
           </a:p>
@@ -12714,7 +12714,7 @@
       </p:sp>
       <p:pic>
         <p:nvPicPr>
-          <p:cNvPr id="6" name="Image 0" descr="/home/claude/kintsugi/docs/submission/img/ab_human_top.png">    </p:cNvPr>
+          <p:cNvPr id="6" name="Image 0" descr="X:\Code\26Projects\kitsug\docs\submission\img\ab_human_top.png">    </p:cNvPr>
           <p:cNvPicPr>
             <a:picLocks noChangeAspect="1"/>
           </p:cNvPicPr>
@@ -12764,7 +12764,7 @@
       </p:sp>
       <p:pic>
         <p:nvPicPr>
-          <p:cNvPr id="8" name="Image 1" descr="/home/claude/kintsugi/docs/submission/img/ab_kin_top.png">    </p:cNvPr>
+          <p:cNvPr id="8" name="Image 1" descr="X:\Code\26Projects\kitsug\docs\submission\img\ab_kin_top.png">    </p:cNvPr>
           <p:cNvPicPr>
             <a:picLocks noChangeAspect="1"/>
           </p:cNvPicPr>
@@ -12969,7 +12969,7 @@
                 <a:ea typeface="Courier New" pitchFamily="34" charset="-122"/>
                 <a:cs typeface="Courier New" pitchFamily="34" charset="-120"/>
               </a:rPr>
-              <a:t>5/5 pass · 4/5 preferred†</a:t>
+              <a:t>5/5 pass hard checks · 4/5 preferred†</a:t>
             </a:r>
             <a:endParaRPr lang="en-US" sz="1150" dirty="0"/>
           </a:p>
@@ -13567,7 +13567,7 @@
       </p:sp>
       <p:pic>
         <p:nvPicPr>
-          <p:cNvPr id="4" name="Image 0" descr="/home/claude/kintsugi/docs/submission/img/customizer.png">    </p:cNvPr>
+          <p:cNvPr id="4" name="Image 0" descr="X:\Code\26Projects\kitsug\docs\submission\img\customizer.png">    </p:cNvPr>
           <p:cNvPicPr>
             <a:picLocks noChangeAspect="1"/>
           </p:cNvPicPr>
